--- a/dist/deck.pptx
+++ b/dist/deck.pptx
@@ -3175,8 +3175,8 @@
         </p:nvSpPr>
         <p:spPr>
           <a:xfrm>
-            <a:off x="9850041" y="508000"/>
-            <a:ext cx="1579959" cy="273050"/>
+            <a:off x="9969500" y="508000"/>
+            <a:ext cx="1460500" cy="298450"/>
           </a:xfrm>
           <a:prstGeom prst="rect">
             <a:avLst/>
@@ -3207,8 +3207,8 @@
         </p:nvSpPr>
         <p:spPr>
           <a:xfrm>
-            <a:off x="9543494" y="552450"/>
-            <a:ext cx="1784906" cy="177800"/>
+            <a:off x="9840754" y="552450"/>
+            <a:ext cx="1487646" cy="203200"/>
           </a:xfrm>
           <a:prstGeom prst="rect">
             <a:avLst/>
@@ -3272,9 +3272,9 @@
                 <a:solidFill>
                   <a:srgbClr val="12212F"/>
                 </a:solidFill>
-                <a:latin typeface="Times New Roman"/>
-                <a:ea typeface="Times New Roman"/>
-                <a:cs typeface="Times New Roman"/>
+                <a:latin typeface="Arial"/>
+                <a:ea typeface="Arial"/>
+                <a:cs typeface="Arial"/>
               </a:rPr>
               <a:t>מרעיון למיזם בר־בחינה</a:t>
             </a:r>
@@ -3468,7 +3468,7 @@
         <p:spPr>
           <a:xfrm>
             <a:off x="8111133" y="4610100"/>
-            <a:ext cx="3318867" cy="165100"/>
+            <a:ext cx="3318867" cy="184150"/>
           </a:xfrm>
           <a:prstGeom prst="rect">
             <a:avLst/>
@@ -3508,7 +3508,7 @@
         </p:nvSpPr>
         <p:spPr>
           <a:xfrm>
-            <a:off x="8111133" y="4826000"/>
+            <a:off x="8111133" y="4845050"/>
             <a:ext cx="3318867" cy="274241"/>
           </a:xfrm>
           <a:prstGeom prst="rect">
@@ -3532,9 +3532,9 @@
                 <a:solidFill>
                   <a:srgbClr val="12212F"/>
                 </a:solidFill>
-                <a:latin typeface="Times New Roman"/>
-                <a:ea typeface="Times New Roman"/>
-                <a:cs typeface="Times New Roman"/>
+                <a:latin typeface="Arial"/>
+                <a:ea typeface="Arial"/>
+                <a:cs typeface="Arial"/>
               </a:rPr>
               <a:t>רעיון</a:t>
             </a:r>
@@ -3549,7 +3549,7 @@
         </p:nvSpPr>
         <p:spPr>
           <a:xfrm>
-            <a:off x="8111133" y="5176441"/>
+            <a:off x="8111133" y="5195491"/>
             <a:ext cx="3318867" cy="213320"/>
           </a:xfrm>
           <a:prstGeom prst="rect">
@@ -3623,7 +3623,7 @@
         <p:spPr>
           <a:xfrm>
             <a:off x="4436566" y="4610100"/>
-            <a:ext cx="3318966" cy="165100"/>
+            <a:ext cx="3318966" cy="184150"/>
           </a:xfrm>
           <a:prstGeom prst="rect">
             <a:avLst/>
@@ -3663,7 +3663,7 @@
         </p:nvSpPr>
         <p:spPr>
           <a:xfrm>
-            <a:off x="4436566" y="4826000"/>
+            <a:off x="4436566" y="4845050"/>
             <a:ext cx="3318966" cy="274241"/>
           </a:xfrm>
           <a:prstGeom prst="rect">
@@ -3687,9 +3687,9 @@
                 <a:solidFill>
                   <a:srgbClr val="12212F"/>
                 </a:solidFill>
-                <a:latin typeface="Times New Roman"/>
-                <a:ea typeface="Times New Roman"/>
-                <a:cs typeface="Times New Roman"/>
+                <a:latin typeface="Arial"/>
+                <a:ea typeface="Arial"/>
+                <a:cs typeface="Arial"/>
               </a:rPr>
               <a:t>בחינה</a:t>
             </a:r>
@@ -3704,7 +3704,7 @@
         </p:nvSpPr>
         <p:spPr>
           <a:xfrm>
-            <a:off x="4436566" y="5176441"/>
+            <a:off x="4436566" y="5195491"/>
             <a:ext cx="3318966" cy="213320"/>
           </a:xfrm>
           <a:prstGeom prst="rect">
@@ -3778,7 +3778,7 @@
         <p:spPr>
           <a:xfrm>
             <a:off x="762000" y="4610100"/>
-            <a:ext cx="3318966" cy="165100"/>
+            <a:ext cx="3318966" cy="184150"/>
           </a:xfrm>
           <a:prstGeom prst="rect">
             <a:avLst/>
@@ -3818,7 +3818,7 @@
         </p:nvSpPr>
         <p:spPr>
           <a:xfrm>
-            <a:off x="762000" y="4826000"/>
+            <a:off x="762000" y="4845050"/>
             <a:ext cx="3318966" cy="274241"/>
           </a:xfrm>
           <a:prstGeom prst="rect">
@@ -3842,9 +3842,9 @@
                 <a:solidFill>
                   <a:srgbClr val="12212F"/>
                 </a:solidFill>
-                <a:latin typeface="Times New Roman"/>
-                <a:ea typeface="Times New Roman"/>
-                <a:cs typeface="Times New Roman"/>
+                <a:latin typeface="Arial"/>
+                <a:ea typeface="Arial"/>
+                <a:cs typeface="Arial"/>
               </a:rPr>
               <a:t>החלטה</a:t>
             </a:r>
@@ -3859,7 +3859,7 @@
         </p:nvSpPr>
         <p:spPr>
           <a:xfrm>
-            <a:off x="762000" y="5176441"/>
+            <a:off x="762000" y="5195491"/>
             <a:ext cx="3318966" cy="213320"/>
           </a:xfrm>
           <a:prstGeom prst="rect">
@@ -3932,8 +3932,8 @@
         </p:nvSpPr>
         <p:spPr>
           <a:xfrm>
-            <a:off x="9012238" y="6121400"/>
-            <a:ext cx="2417763" cy="165100"/>
+            <a:off x="9111805" y="6121400"/>
+            <a:ext cx="2318195" cy="184150"/>
           </a:xfrm>
           <a:prstGeom prst="rect">
             <a:avLst/>
@@ -3973,8 +3973,8 @@
         </p:nvSpPr>
         <p:spPr>
           <a:xfrm>
-            <a:off x="619101" y="6121400"/>
-            <a:ext cx="545529" cy="165100"/>
+            <a:off x="669846" y="6121400"/>
+            <a:ext cx="485854" cy="184150"/>
           </a:xfrm>
           <a:prstGeom prst="rect">
             <a:avLst/>
@@ -4040,8 +4040,8 @@
         </p:nvSpPr>
         <p:spPr>
           <a:xfrm>
-            <a:off x="10219630" y="508000"/>
-            <a:ext cx="1210370" cy="273050"/>
+            <a:off x="10325100" y="508000"/>
+            <a:ext cx="1104900" cy="298450"/>
           </a:xfrm>
           <a:prstGeom prst="rect">
             <a:avLst/>
@@ -4072,8 +4072,8 @@
         </p:nvSpPr>
         <p:spPr>
           <a:xfrm>
-            <a:off x="10006441" y="552450"/>
-            <a:ext cx="1321959" cy="177800"/>
+            <a:off x="10209800" y="552450"/>
+            <a:ext cx="1118600" cy="203200"/>
           </a:xfrm>
           <a:prstGeom prst="rect">
             <a:avLst/>
@@ -4137,9 +4137,9 @@
                 <a:solidFill>
                   <a:srgbClr val="12212F"/>
                 </a:solidFill>
-                <a:latin typeface="Times New Roman"/>
-                <a:ea typeface="Times New Roman"/>
-                <a:cs typeface="Times New Roman"/>
+                <a:latin typeface="Arial"/>
+                <a:ea typeface="Arial"/>
+                <a:cs typeface="Arial"/>
               </a:rPr>
               <a:t>נעים להכיר</a:t>
             </a:r>
@@ -4148,48 +4148,7 @@
       </p:sp>
       <p:sp>
         <p:nvSpPr>
-          <p:cNvPr id="5" name="TextBox 4"/>
-          <p:cNvSpPr txBox="1"/>
-          <p:nvPr/>
-        </p:nvSpPr>
-        <p:spPr>
-          <a:xfrm>
-            <a:off x="2315400" y="1828800"/>
-            <a:ext cx="9114600" cy="274241"/>
-          </a:xfrm>
-          <a:prstGeom prst="rect">
-            <a:avLst/>
-          </a:prstGeom>
-          <a:noFill/>
-        </p:spPr>
-        <p:txBody>
-          <a:bodyPr wrap="square" lIns="0" rIns="0" tIns="0" bIns="0" anchor="t">
-            <a:noAutofit/>
-          </a:bodyPr>
-          <a:lstStyle/>
-          <a:p>
-            <a:pPr algn="r" rtl="1">
-              <a:lnSpc>
-                <a:spcPts val="2160"/>
-              </a:lnSpc>
-            </a:pPr>
-            <a:r>
-              <a:rPr sz="1600" b="0">
-                <a:solidFill>
-                  <a:srgbClr val="4C4A44"/>
-                </a:solidFill>
-                <a:latin typeface="Arial"/>
-                <a:ea typeface="Arial"/>
-                <a:cs typeface="Arial"/>
-              </a:rPr>
-              <a:t>במיזם הזה אעזור לכם לפרק את הרעיון לשאלות שצריך לבדוק לפני שמחליטים כמה ואיך להשקיע.</a:t>
-            </a:r>
-          </a:p>
-        </p:txBody>
-      </p:sp>
-      <p:sp>
-        <p:nvSpPr>
-          <p:cNvPr id="6" name="Rectangle 5"/>
+          <p:cNvPr id="5" name="Rectangle 4"/>
           <p:cNvSpPr/>
           <p:nvPr/>
         </p:nvSpPr>
@@ -4221,7 +4180,7 @@
       </p:sp>
       <p:sp>
         <p:nvSpPr>
-          <p:cNvPr id="7" name="Rectangle 6"/>
+          <p:cNvPr id="6" name="Rectangle 5"/>
           <p:cNvSpPr/>
           <p:nvPr/>
         </p:nvSpPr>
@@ -4253,7 +4212,7 @@
       </p:sp>
       <p:sp>
         <p:nvSpPr>
-          <p:cNvPr id="8" name="Rectangle 7"/>
+          <p:cNvPr id="7" name="Rectangle 6"/>
           <p:cNvSpPr/>
           <p:nvPr/>
         </p:nvSpPr>
@@ -4285,7 +4244,7 @@
       </p:sp>
       <p:pic>
         <p:nvPicPr>
-          <p:cNvPr id="9" name="Picture 8" descr="image.png"/>
+          <p:cNvPr id="8" name="Picture 7" descr="image.png"/>
           <p:cNvPicPr>
             <a:picLocks noChangeAspect="1"/>
           </p:cNvPicPr>
@@ -4309,7 +4268,7 @@
       </p:pic>
       <p:sp>
         <p:nvSpPr>
-          <p:cNvPr id="10" name="TextBox 9"/>
+          <p:cNvPr id="9" name="TextBox 8"/>
           <p:cNvSpPr txBox="1"/>
           <p:nvPr/>
         </p:nvSpPr>
@@ -4339,9 +4298,9 @@
                 <a:solidFill>
                   <a:srgbClr val="12212F"/>
                 </a:solidFill>
-                <a:latin typeface="Times New Roman"/>
-                <a:ea typeface="Times New Roman"/>
-                <a:cs typeface="Times New Roman"/>
+                <a:latin typeface="Arial"/>
+                <a:ea typeface="Arial"/>
+                <a:cs typeface="Arial"/>
               </a:rPr>
               <a:t>אלון רותם</a:t>
             </a:r>
@@ -4350,7 +4309,7 @@
       </p:sp>
       <p:sp>
         <p:nvSpPr>
-          <p:cNvPr id="11" name="TextBox 10"/>
+          <p:cNvPr id="10" name="TextBox 9"/>
           <p:cNvSpPr txBox="1"/>
           <p:nvPr/>
         </p:nvSpPr>
@@ -4391,7 +4350,7 @@
       </p:sp>
       <p:sp>
         <p:nvSpPr>
-          <p:cNvPr id="12" name="TextBox 11"/>
+          <p:cNvPr id="11" name="TextBox 10"/>
           <p:cNvSpPr txBox="1"/>
           <p:nvPr/>
         </p:nvSpPr>
@@ -4443,14 +4402,14 @@
       </p:sp>
       <p:sp>
         <p:nvSpPr>
-          <p:cNvPr id="13" name="Rectangle 12"/>
+          <p:cNvPr id="12" name="Rectangle 11"/>
           <p:cNvSpPr/>
           <p:nvPr/>
         </p:nvSpPr>
         <p:spPr>
           <a:xfrm>
-            <a:off x="8608020" y="2387600"/>
-            <a:ext cx="535980" cy="234950"/>
+            <a:off x="8655050" y="2387600"/>
+            <a:ext cx="488950" cy="254000"/>
           </a:xfrm>
           <a:prstGeom prst="rect">
             <a:avLst/>
@@ -4475,54 +4434,54 @@
       </p:sp>
       <p:sp>
         <p:nvSpPr>
+          <p:cNvPr id="13" name="TextBox 12"/>
+          <p:cNvSpPr txBox="1"/>
+          <p:nvPr/>
+        </p:nvSpPr>
+        <p:spPr>
+          <a:xfrm>
+            <a:off x="8668464" y="2419350"/>
+            <a:ext cx="380286" cy="184150"/>
+          </a:xfrm>
+          <a:prstGeom prst="rect">
+            <a:avLst/>
+          </a:prstGeom>
+          <a:noFill/>
+        </p:spPr>
+        <p:txBody>
+          <a:bodyPr wrap="square" lIns="0" rIns="0" tIns="0" bIns="0" anchor="t">
+            <a:noAutofit/>
+          </a:bodyPr>
+          <a:lstStyle/>
+          <a:p>
+            <a:pPr algn="r" rtl="1">
+              <a:lnSpc>
+                <a:spcPts val="1200"/>
+              </a:lnSpc>
+            </a:pPr>
+            <a:r>
+              <a:rPr sz="1000" b="1">
+                <a:solidFill>
+                  <a:srgbClr val="FFFFFF"/>
+                </a:solidFill>
+                <a:latin typeface="Arial"/>
+                <a:ea typeface="Arial"/>
+                <a:cs typeface="Arial"/>
+              </a:rPr>
+              <a:t>ניסיון</a:t>
+            </a:r>
+          </a:p>
+        </p:txBody>
+      </p:sp>
+      <p:sp>
+        <p:nvSpPr>
           <p:cNvPr id="14" name="TextBox 13"/>
           <p:cNvSpPr txBox="1"/>
           <p:nvPr/>
         </p:nvSpPr>
         <p:spPr>
           <a:xfrm>
-            <a:off x="8566007" y="2419350"/>
-            <a:ext cx="482743" cy="165100"/>
-          </a:xfrm>
-          <a:prstGeom prst="rect">
-            <a:avLst/>
-          </a:prstGeom>
-          <a:noFill/>
-        </p:spPr>
-        <p:txBody>
-          <a:bodyPr wrap="square" lIns="0" rIns="0" tIns="0" bIns="0" anchor="t">
-            <a:noAutofit/>
-          </a:bodyPr>
-          <a:lstStyle/>
-          <a:p>
-            <a:pPr algn="r" rtl="1">
-              <a:lnSpc>
-                <a:spcPts val="1200"/>
-              </a:lnSpc>
-            </a:pPr>
-            <a:r>
-              <a:rPr sz="1000" b="1">
-                <a:solidFill>
-                  <a:srgbClr val="FFFFFF"/>
-                </a:solidFill>
-                <a:latin typeface="Arial"/>
-                <a:ea typeface="Arial"/>
-                <a:cs typeface="Arial"/>
-              </a:rPr>
-              <a:t>ניסיון</a:t>
-            </a:r>
-          </a:p>
-        </p:txBody>
-      </p:sp>
-      <p:sp>
-        <p:nvSpPr>
-          <p:cNvPr id="15" name="TextBox 14"/>
-          <p:cNvSpPr txBox="1"/>
-          <p:nvPr/>
-        </p:nvSpPr>
-        <p:spPr>
-          <a:xfrm>
-            <a:off x="762000" y="2711450"/>
+            <a:off x="762000" y="2730500"/>
             <a:ext cx="8382000" cy="205680"/>
           </a:xfrm>
           <a:prstGeom prst="rect">
@@ -4557,13 +4516,13 @@
       </p:sp>
       <p:sp>
         <p:nvSpPr>
-          <p:cNvPr id="16" name="Rectangle 15"/>
+          <p:cNvPr id="15" name="Rectangle 14"/>
           <p:cNvSpPr/>
           <p:nvPr/>
         </p:nvSpPr>
         <p:spPr>
           <a:xfrm>
-            <a:off x="9086850" y="3056830"/>
+            <a:off x="9086850" y="3075880"/>
             <a:ext cx="57150" cy="57150"/>
           </a:xfrm>
           <a:prstGeom prst="rect">
@@ -4589,13 +4548,13 @@
       </p:sp>
       <p:sp>
         <p:nvSpPr>
-          <p:cNvPr id="17" name="TextBox 16"/>
-          <p:cNvSpPr txBox="1"/>
-          <p:nvPr/>
-        </p:nvSpPr>
-        <p:spPr>
-          <a:xfrm>
-            <a:off x="6493966" y="2993330"/>
+          <p:cNvPr id="16" name="TextBox 15"/>
+          <p:cNvSpPr txBox="1"/>
+          <p:nvPr/>
+        </p:nvSpPr>
+        <p:spPr>
+          <a:xfrm>
+            <a:off x="6493966" y="3012380"/>
             <a:ext cx="2491284" cy="198041"/>
           </a:xfrm>
           <a:prstGeom prst="rect">
@@ -4630,13 +4589,13 @@
       </p:sp>
       <p:sp>
         <p:nvSpPr>
-          <p:cNvPr id="18" name="Rectangle 17"/>
+          <p:cNvPr id="17" name="Rectangle 16"/>
           <p:cNvSpPr/>
           <p:nvPr/>
         </p:nvSpPr>
         <p:spPr>
           <a:xfrm>
-            <a:off x="6220916" y="3056830"/>
+            <a:off x="6220916" y="3075880"/>
             <a:ext cx="57150" cy="57150"/>
           </a:xfrm>
           <a:prstGeom prst="rect">
@@ -4662,13 +4621,13 @@
       </p:sp>
       <p:sp>
         <p:nvSpPr>
-          <p:cNvPr id="19" name="TextBox 18"/>
-          <p:cNvSpPr txBox="1"/>
-          <p:nvPr/>
-        </p:nvSpPr>
-        <p:spPr>
-          <a:xfrm>
-            <a:off x="3628033" y="2993330"/>
+          <p:cNvPr id="18" name="TextBox 17"/>
+          <p:cNvSpPr txBox="1"/>
+          <p:nvPr/>
+        </p:nvSpPr>
+        <p:spPr>
+          <a:xfrm>
+            <a:off x="3628033" y="3012380"/>
             <a:ext cx="2491284" cy="198041"/>
           </a:xfrm>
           <a:prstGeom prst="rect">
@@ -4703,13 +4662,13 @@
       </p:sp>
       <p:sp>
         <p:nvSpPr>
-          <p:cNvPr id="20" name="Rectangle 19"/>
+          <p:cNvPr id="19" name="Rectangle 18"/>
           <p:cNvSpPr/>
           <p:nvPr/>
         </p:nvSpPr>
         <p:spPr>
           <a:xfrm>
-            <a:off x="3354983" y="3056830"/>
+            <a:off x="3354983" y="3075880"/>
             <a:ext cx="57150" cy="57150"/>
           </a:xfrm>
           <a:prstGeom prst="rect">
@@ -4735,13 +4694,13 @@
       </p:sp>
       <p:sp>
         <p:nvSpPr>
-          <p:cNvPr id="21" name="TextBox 20"/>
-          <p:cNvSpPr txBox="1"/>
-          <p:nvPr/>
-        </p:nvSpPr>
-        <p:spPr>
-          <a:xfrm>
-            <a:off x="762000" y="2993330"/>
+          <p:cNvPr id="20" name="TextBox 19"/>
+          <p:cNvSpPr txBox="1"/>
+          <p:nvPr/>
+        </p:nvSpPr>
+        <p:spPr>
+          <a:xfrm>
+            <a:off x="762000" y="3012380"/>
             <a:ext cx="2491383" cy="198041"/>
           </a:xfrm>
           <a:prstGeom prst="rect">
@@ -4776,13 +4735,13 @@
       </p:sp>
       <p:sp>
         <p:nvSpPr>
-          <p:cNvPr id="22" name="Rectangle 21"/>
+          <p:cNvPr id="21" name="Rectangle 20"/>
           <p:cNvSpPr/>
           <p:nvPr/>
         </p:nvSpPr>
         <p:spPr>
           <a:xfrm>
-            <a:off x="9086850" y="3312021"/>
+            <a:off x="9086850" y="3331071"/>
             <a:ext cx="57150" cy="57150"/>
           </a:xfrm>
           <a:prstGeom prst="rect">
@@ -4808,13 +4767,13 @@
       </p:sp>
       <p:sp>
         <p:nvSpPr>
-          <p:cNvPr id="23" name="TextBox 22"/>
-          <p:cNvSpPr txBox="1"/>
-          <p:nvPr/>
-        </p:nvSpPr>
-        <p:spPr>
-          <a:xfrm>
-            <a:off x="6493966" y="3248521"/>
+          <p:cNvPr id="22" name="TextBox 21"/>
+          <p:cNvSpPr txBox="1"/>
+          <p:nvPr/>
+        </p:nvSpPr>
+        <p:spPr>
+          <a:xfrm>
+            <a:off x="6493966" y="3267571"/>
             <a:ext cx="2491284" cy="198041"/>
           </a:xfrm>
           <a:prstGeom prst="rect">
@@ -4849,13 +4808,13 @@
       </p:sp>
       <p:sp>
         <p:nvSpPr>
-          <p:cNvPr id="24" name="Rectangle 23"/>
+          <p:cNvPr id="23" name="Rectangle 22"/>
           <p:cNvSpPr/>
           <p:nvPr/>
         </p:nvSpPr>
         <p:spPr>
           <a:xfrm>
-            <a:off x="6220916" y="3312021"/>
+            <a:off x="6220916" y="3331071"/>
             <a:ext cx="57150" cy="57150"/>
           </a:xfrm>
           <a:prstGeom prst="rect">
@@ -4881,13 +4840,13 @@
       </p:sp>
       <p:sp>
         <p:nvSpPr>
-          <p:cNvPr id="25" name="TextBox 24"/>
-          <p:cNvSpPr txBox="1"/>
-          <p:nvPr/>
-        </p:nvSpPr>
-        <p:spPr>
-          <a:xfrm>
-            <a:off x="3628033" y="3248521"/>
+          <p:cNvPr id="24" name="TextBox 23"/>
+          <p:cNvSpPr txBox="1"/>
+          <p:nvPr/>
+        </p:nvSpPr>
+        <p:spPr>
+          <a:xfrm>
+            <a:off x="3628033" y="3267571"/>
             <a:ext cx="2491284" cy="198041"/>
           </a:xfrm>
           <a:prstGeom prst="rect">
@@ -4922,14 +4881,14 @@
       </p:sp>
       <p:sp>
         <p:nvSpPr>
-          <p:cNvPr id="26" name="Rectangle 25"/>
+          <p:cNvPr id="25" name="Rectangle 24"/>
           <p:cNvSpPr/>
           <p:nvPr/>
         </p:nvSpPr>
         <p:spPr>
           <a:xfrm>
-            <a:off x="8521700" y="3831530"/>
-            <a:ext cx="622300" cy="234950"/>
+            <a:off x="8553450" y="3822005"/>
+            <a:ext cx="590550" cy="254000"/>
           </a:xfrm>
           <a:prstGeom prst="rect">
             <a:avLst/>
@@ -4954,41 +4913,93 @@
       </p:sp>
       <p:sp>
         <p:nvSpPr>
+          <p:cNvPr id="26" name="TextBox 25"/>
+          <p:cNvSpPr txBox="1"/>
+          <p:nvPr/>
+        </p:nvSpPr>
+        <p:spPr>
+          <a:xfrm>
+            <a:off x="8536781" y="3853755"/>
+            <a:ext cx="511969" cy="184150"/>
+          </a:xfrm>
+          <a:prstGeom prst="rect">
+            <a:avLst/>
+          </a:prstGeom>
+          <a:noFill/>
+        </p:spPr>
+        <p:txBody>
+          <a:bodyPr wrap="square" lIns="0" rIns="0" tIns="0" bIns="0" anchor="t">
+            <a:noAutofit/>
+          </a:bodyPr>
+          <a:lstStyle/>
+          <a:p>
+            <a:pPr algn="r" rtl="1">
+              <a:lnSpc>
+                <a:spcPts val="1200"/>
+              </a:lnSpc>
+            </a:pPr>
+            <a:r>
+              <a:rPr sz="1000" b="1">
+                <a:solidFill>
+                  <a:srgbClr val="FFFFFF"/>
+                </a:solidFill>
+                <a:latin typeface="Arial"/>
+                <a:ea typeface="Arial"/>
+                <a:cs typeface="Arial"/>
+              </a:rPr>
+              <a:t>השכלה</a:t>
+            </a:r>
+          </a:p>
+        </p:txBody>
+      </p:sp>
+      <p:sp>
+        <p:nvSpPr>
           <p:cNvPr id="27" name="TextBox 26"/>
           <p:cNvSpPr txBox="1"/>
           <p:nvPr/>
         </p:nvSpPr>
         <p:spPr>
           <a:xfrm>
-            <a:off x="8451437" y="3863280"/>
-            <a:ext cx="597313" cy="165100"/>
-          </a:xfrm>
-          <a:prstGeom prst="rect">
-            <a:avLst/>
-          </a:prstGeom>
-          <a:noFill/>
-        </p:spPr>
-        <p:txBody>
-          <a:bodyPr wrap="square" lIns="0" rIns="0" tIns="0" bIns="0" anchor="t">
-            <a:noAutofit/>
-          </a:bodyPr>
-          <a:lstStyle/>
-          <a:p>
-            <a:pPr algn="r" rtl="1">
-              <a:lnSpc>
-                <a:spcPts val="1200"/>
-              </a:lnSpc>
-            </a:pPr>
-            <a:r>
-              <a:rPr sz="1000" b="1">
-                <a:solidFill>
-                  <a:srgbClr val="FFFFFF"/>
-                </a:solidFill>
-                <a:latin typeface="Arial"/>
-                <a:ea typeface="Arial"/>
-                <a:cs typeface="Arial"/>
-              </a:rPr>
-              <a:t>השכלה</a:t>
+            <a:off x="762000" y="4164905"/>
+            <a:ext cx="8382000" cy="198041"/>
+          </a:xfrm>
+          <a:prstGeom prst="rect">
+            <a:avLst/>
+          </a:prstGeom>
+          <a:noFill/>
+        </p:spPr>
+        <p:txBody>
+          <a:bodyPr wrap="square" lIns="0" rIns="0" tIns="0" bIns="0" anchor="t">
+            <a:noAutofit/>
+          </a:bodyPr>
+          <a:lstStyle/>
+          <a:p>
+            <a:pPr algn="r" rtl="1">
+              <a:lnSpc>
+                <a:spcPts val="1560"/>
+              </a:lnSpc>
+            </a:pPr>
+            <a:r>
+              <a:rPr sz="1200" b="0">
+                <a:solidFill>
+                  <a:srgbClr val="22384A"/>
+                </a:solidFill>
+                <a:latin typeface="Arial"/>
+                <a:ea typeface="Arial"/>
+                <a:cs typeface="Arial"/>
+              </a:rPr>
+              <a:t>⁦M.B.A⁩</a:t>
+            </a:r>
+            <a:r>
+              <a:rPr sz="1200" b="0">
+                <a:solidFill>
+                  <a:srgbClr val="22384A"/>
+                </a:solidFill>
+                <a:latin typeface="Arial"/>
+                <a:ea typeface="Arial"/>
+                <a:cs typeface="Arial"/>
+              </a:rPr>
+              <a:t> — אוניברסיטת תל אביב, בהצטיינות</a:t>
             </a:r>
           </a:p>
         </p:txBody>
@@ -5001,7 +5012,7 @@
         </p:nvSpPr>
         <p:spPr>
           <a:xfrm>
-            <a:off x="762000" y="4155380"/>
+            <a:off x="762000" y="4407396"/>
             <a:ext cx="8382000" cy="198041"/>
           </a:xfrm>
           <a:prstGeom prst="rect">
@@ -5029,7 +5040,7 @@
                 <a:ea typeface="Arial"/>
                 <a:cs typeface="Arial"/>
               </a:rPr>
-              <a:t>⁦M.B.A⁩</a:t>
+              <a:t>⁦B.A⁩</a:t>
             </a:r>
             <a:r>
               <a:rPr sz="1200" b="0">
@@ -5040,58 +5051,6 @@
                 <a:ea typeface="Arial"/>
                 <a:cs typeface="Arial"/>
               </a:rPr>
-              <a:t> — אוניברסיטת תל אביב, בהצטיינות</a:t>
-            </a:r>
-          </a:p>
-        </p:txBody>
-      </p:sp>
-      <p:sp>
-        <p:nvSpPr>
-          <p:cNvPr id="29" name="TextBox 28"/>
-          <p:cNvSpPr txBox="1"/>
-          <p:nvPr/>
-        </p:nvSpPr>
-        <p:spPr>
-          <a:xfrm>
-            <a:off x="762000" y="4397871"/>
-            <a:ext cx="8382000" cy="198041"/>
-          </a:xfrm>
-          <a:prstGeom prst="rect">
-            <a:avLst/>
-          </a:prstGeom>
-          <a:noFill/>
-        </p:spPr>
-        <p:txBody>
-          <a:bodyPr wrap="square" lIns="0" rIns="0" tIns="0" bIns="0" anchor="t">
-            <a:noAutofit/>
-          </a:bodyPr>
-          <a:lstStyle/>
-          <a:p>
-            <a:pPr algn="r" rtl="1">
-              <a:lnSpc>
-                <a:spcPts val="1560"/>
-              </a:lnSpc>
-            </a:pPr>
-            <a:r>
-              <a:rPr sz="1200" b="0">
-                <a:solidFill>
-                  <a:srgbClr val="22384A"/>
-                </a:solidFill>
-                <a:latin typeface="Arial"/>
-                <a:ea typeface="Arial"/>
-                <a:cs typeface="Arial"/>
-              </a:rPr>
-              <a:t>⁦B.A⁩</a:t>
-            </a:r>
-            <a:r>
-              <a:rPr sz="1200" b="0">
-                <a:solidFill>
-                  <a:srgbClr val="22384A"/>
-                </a:solidFill>
-                <a:latin typeface="Arial"/>
-                <a:ea typeface="Arial"/>
-                <a:cs typeface="Arial"/>
-              </a:rPr>
               <a:t> מנהל עסקים — המרכז הבינתחומי הרצליה, בהצטיינות יתרה</a:t>
             </a:r>
           </a:p>
@@ -5099,14 +5058,14 @@
       </p:sp>
       <p:sp>
         <p:nvSpPr>
-          <p:cNvPr id="30" name="Rectangle 29"/>
+          <p:cNvPr id="29" name="Rectangle 28"/>
           <p:cNvSpPr/>
           <p:nvPr/>
         </p:nvSpPr>
         <p:spPr>
           <a:xfrm>
-            <a:off x="7874000" y="4980880"/>
-            <a:ext cx="1270000" cy="234950"/>
+            <a:off x="8007350" y="4961830"/>
+            <a:ext cx="1136650" cy="254000"/>
           </a:xfrm>
           <a:prstGeom prst="rect">
             <a:avLst/>
@@ -5131,14 +5090,14 @@
       </p:sp>
       <p:sp>
         <p:nvSpPr>
-          <p:cNvPr id="31" name="TextBox 30"/>
-          <p:cNvSpPr txBox="1"/>
-          <p:nvPr/>
-        </p:nvSpPr>
-        <p:spPr>
-          <a:xfrm>
-            <a:off x="7633891" y="5012630"/>
-            <a:ext cx="1414859" cy="165100"/>
+          <p:cNvPr id="30" name="TextBox 29"/>
+          <p:cNvSpPr txBox="1"/>
+          <p:nvPr/>
+        </p:nvSpPr>
+        <p:spPr>
+          <a:xfrm>
+            <a:off x="7889923" y="4993580"/>
+            <a:ext cx="1158827" cy="184150"/>
           </a:xfrm>
           <a:prstGeom prst="rect">
             <a:avLst/>
@@ -5172,7 +5131,7 @@
       </p:sp>
       <p:sp>
         <p:nvSpPr>
-          <p:cNvPr id="32" name="Rectangle 31"/>
+          <p:cNvPr id="31" name="Rectangle 30"/>
           <p:cNvSpPr/>
           <p:nvPr/>
         </p:nvSpPr>
@@ -5204,7 +5163,7 @@
       </p:sp>
       <p:sp>
         <p:nvSpPr>
-          <p:cNvPr id="33" name="Rectangle 32"/>
+          <p:cNvPr id="32" name="Rectangle 31"/>
           <p:cNvSpPr/>
           <p:nvPr/>
         </p:nvSpPr>
@@ -5236,7 +5195,7 @@
       </p:sp>
       <p:sp>
         <p:nvSpPr>
-          <p:cNvPr id="34" name="TextBox 33"/>
+          <p:cNvPr id="33" name="TextBox 32"/>
           <p:cNvSpPr txBox="1"/>
           <p:nvPr/>
         </p:nvSpPr>
@@ -5277,7 +5236,7 @@
       </p:sp>
       <p:sp>
         <p:nvSpPr>
-          <p:cNvPr id="35" name="Rectangle 34"/>
+          <p:cNvPr id="34" name="Rectangle 33"/>
           <p:cNvSpPr/>
           <p:nvPr/>
         </p:nvSpPr>
@@ -5309,55 +5268,55 @@
       </p:sp>
       <p:sp>
         <p:nvSpPr>
+          <p:cNvPr id="35" name="TextBox 34"/>
+          <p:cNvSpPr txBox="1"/>
+          <p:nvPr/>
+        </p:nvSpPr>
+        <p:spPr>
+          <a:xfrm>
+            <a:off x="9736328" y="6121400"/>
+            <a:ext cx="1693672" cy="184150"/>
+          </a:xfrm>
+          <a:prstGeom prst="rect">
+            <a:avLst/>
+          </a:prstGeom>
+          <a:noFill/>
+        </p:spPr>
+        <p:txBody>
+          <a:bodyPr wrap="square" lIns="0" rIns="0" tIns="0" bIns="0" anchor="t">
+            <a:noAutofit/>
+          </a:bodyPr>
+          <a:lstStyle/>
+          <a:p>
+            <a:pPr algn="r" rtl="1">
+              <a:lnSpc>
+                <a:spcPts val="1200"/>
+              </a:lnSpc>
+            </a:pPr>
+            <a:r>
+              <a:rPr sz="1000" b="0">
+                <a:solidFill>
+                  <a:srgbClr val="7B7970"/>
+                </a:solidFill>
+                <a:latin typeface="Arial"/>
+                <a:ea typeface="Arial"/>
+                <a:cs typeface="Arial"/>
+              </a:rPr>
+              <a:t>רקע מקצועי · התפקיד בליווי</a:t>
+            </a:r>
+          </a:p>
+        </p:txBody>
+      </p:sp>
+      <p:sp>
+        <p:nvSpPr>
           <p:cNvPr id="36" name="TextBox 35"/>
           <p:cNvSpPr txBox="1"/>
           <p:nvPr/>
         </p:nvSpPr>
         <p:spPr>
           <a:xfrm>
-            <a:off x="9662430" y="6121400"/>
-            <a:ext cx="1767570" cy="165100"/>
-          </a:xfrm>
-          <a:prstGeom prst="rect">
-            <a:avLst/>
-          </a:prstGeom>
-          <a:noFill/>
-        </p:spPr>
-        <p:txBody>
-          <a:bodyPr wrap="square" lIns="0" rIns="0" tIns="0" bIns="0" anchor="t">
-            <a:noAutofit/>
-          </a:bodyPr>
-          <a:lstStyle/>
-          <a:p>
-            <a:pPr algn="r" rtl="1">
-              <a:lnSpc>
-                <a:spcPts val="1200"/>
-              </a:lnSpc>
-            </a:pPr>
-            <a:r>
-              <a:rPr sz="1000" b="0">
-                <a:solidFill>
-                  <a:srgbClr val="7B7970"/>
-                </a:solidFill>
-                <a:latin typeface="Arial"/>
-                <a:ea typeface="Arial"/>
-                <a:cs typeface="Arial"/>
-              </a:rPr>
-              <a:t>רקע מקצועי · התפקיד בליווי</a:t>
-            </a:r>
-          </a:p>
-        </p:txBody>
-      </p:sp>
-      <p:sp>
-        <p:nvSpPr>
-          <p:cNvPr id="37" name="TextBox 36"/>
-          <p:cNvSpPr txBox="1"/>
-          <p:nvPr/>
-        </p:nvSpPr>
-        <p:spPr>
-          <a:xfrm>
-            <a:off x="619101" y="6121400"/>
-            <a:ext cx="545529" cy="165100"/>
+            <a:off x="669846" y="6121400"/>
+            <a:ext cx="485854" cy="184150"/>
           </a:xfrm>
           <a:prstGeom prst="rect">
             <a:avLst/>
@@ -5423,8 +5382,8 @@
         </p:nvSpPr>
         <p:spPr>
           <a:xfrm>
-            <a:off x="10387310" y="508000"/>
-            <a:ext cx="1042690" cy="273050"/>
+            <a:off x="10490200" y="508000"/>
+            <a:ext cx="939800" cy="298450"/>
           </a:xfrm>
           <a:prstGeom prst="rect">
             <a:avLst/>
@@ -5455,8 +5414,8 @@
         </p:nvSpPr>
         <p:spPr>
           <a:xfrm>
-            <a:off x="10227913" y="552450"/>
-            <a:ext cx="1100487" cy="177800"/>
+            <a:off x="10400046" y="552450"/>
+            <a:ext cx="928354" cy="203200"/>
           </a:xfrm>
           <a:prstGeom prst="rect">
             <a:avLst/>
@@ -5496,8 +5455,8 @@
         </p:nvSpPr>
         <p:spPr>
           <a:xfrm>
-            <a:off x="1905000" y="901700"/>
-            <a:ext cx="9525000" cy="426641"/>
+            <a:off x="521176" y="901700"/>
+            <a:ext cx="10908824" cy="426641"/>
           </a:xfrm>
           <a:prstGeom prst="rect">
             <a:avLst/>
@@ -5520,9 +5479,9 @@
                 <a:solidFill>
                   <a:srgbClr val="12212F"/>
                 </a:solidFill>
-                <a:latin typeface="Times New Roman"/>
-                <a:ea typeface="Times New Roman"/>
-                <a:cs typeface="Times New Roman"/>
+                <a:latin typeface="Arial"/>
+                <a:ea typeface="Arial"/>
+                <a:cs typeface="Arial"/>
               </a:rPr>
               <a:t>לפני שבונים מערכת — יש כמה שאלות שצריכות לקבל תשובה</a:t>
             </a:r>
@@ -5651,7 +5610,7 @@
           <a:noFill/>
         </p:spPr>
         <p:txBody>
-          <a:bodyPr wrap="square" lIns="0" rIns="0" tIns="0" bIns="0" anchor="t">
+          <a:bodyPr wrap="square" lIns="0" rIns="0" tIns="0" bIns="0" anchor="ctr">
             <a:noAutofit/>
           </a:bodyPr>
           <a:lstStyle/>
@@ -5666,9 +5625,9 @@
                 <a:solidFill>
                   <a:srgbClr val="FFFFFF"/>
                 </a:solidFill>
-                <a:latin typeface="Times New Roman"/>
-                <a:ea typeface="Times New Roman"/>
-                <a:cs typeface="Times New Roman"/>
+                <a:latin typeface="Arial"/>
+                <a:ea typeface="Arial"/>
+                <a:cs typeface="Arial"/>
               </a:rPr>
               <a:t>01</a:t>
             </a:r>
@@ -5891,7 +5850,7 @@
           <a:noFill/>
         </p:spPr>
         <p:txBody>
-          <a:bodyPr wrap="square" lIns="0" rIns="0" tIns="0" bIns="0" anchor="t">
+          <a:bodyPr wrap="square" lIns="0" rIns="0" tIns="0" bIns="0" anchor="ctr">
             <a:noAutofit/>
           </a:bodyPr>
           <a:lstStyle/>
@@ -5906,9 +5865,9 @@
                 <a:solidFill>
                   <a:srgbClr val="FFFFFF"/>
                 </a:solidFill>
-                <a:latin typeface="Times New Roman"/>
-                <a:ea typeface="Times New Roman"/>
-                <a:cs typeface="Times New Roman"/>
+                <a:latin typeface="Arial"/>
+                <a:ea typeface="Arial"/>
+                <a:cs typeface="Arial"/>
               </a:rPr>
               <a:t>02</a:t>
             </a:r>
@@ -6078,7 +6037,7 @@
           <a:noFill/>
         </p:spPr>
         <p:txBody>
-          <a:bodyPr wrap="square" lIns="0" rIns="0" tIns="0" bIns="0" anchor="t">
+          <a:bodyPr wrap="square" lIns="0" rIns="0" tIns="0" bIns="0" anchor="ctr">
             <a:noAutofit/>
           </a:bodyPr>
           <a:lstStyle/>
@@ -6093,9 +6052,9 @@
                 <a:solidFill>
                   <a:srgbClr val="FFFFFF"/>
                 </a:solidFill>
-                <a:latin typeface="Times New Roman"/>
-                <a:ea typeface="Times New Roman"/>
-                <a:cs typeface="Times New Roman"/>
+                <a:latin typeface="Arial"/>
+                <a:ea typeface="Arial"/>
+                <a:cs typeface="Arial"/>
               </a:rPr>
               <a:t>03</a:t>
             </a:r>
@@ -6296,7 +6255,7 @@
           <a:noFill/>
         </p:spPr>
         <p:txBody>
-          <a:bodyPr wrap="square" lIns="0" rIns="0" tIns="0" bIns="0" anchor="t">
+          <a:bodyPr wrap="square" lIns="0" rIns="0" tIns="0" bIns="0" anchor="ctr">
             <a:noAutofit/>
           </a:bodyPr>
           <a:lstStyle/>
@@ -6311,9 +6270,9 @@
                 <a:solidFill>
                   <a:srgbClr val="FFFFFF"/>
                 </a:solidFill>
-                <a:latin typeface="Times New Roman"/>
-                <a:ea typeface="Times New Roman"/>
-                <a:cs typeface="Times New Roman"/>
+                <a:latin typeface="Arial"/>
+                <a:ea typeface="Arial"/>
+                <a:cs typeface="Arial"/>
               </a:rPr>
               <a:t>04</a:t>
             </a:r>
@@ -6524,7 +6483,7 @@
           <a:noFill/>
         </p:spPr>
         <p:txBody>
-          <a:bodyPr wrap="square" lIns="0" rIns="0" tIns="0" bIns="0" anchor="t">
+          <a:bodyPr wrap="square" lIns="0" rIns="0" tIns="0" bIns="0" anchor="ctr">
             <a:noAutofit/>
           </a:bodyPr>
           <a:lstStyle/>
@@ -6539,9 +6498,9 @@
                 <a:solidFill>
                   <a:srgbClr val="FFFFFF"/>
                 </a:solidFill>
-                <a:latin typeface="Times New Roman"/>
-                <a:ea typeface="Times New Roman"/>
-                <a:cs typeface="Times New Roman"/>
+                <a:latin typeface="Arial"/>
+                <a:ea typeface="Arial"/>
+                <a:cs typeface="Arial"/>
               </a:rPr>
               <a:t>05</a:t>
             </a:r>
@@ -6711,8 +6670,8 @@
         </p:nvSpPr>
         <p:spPr>
           <a:xfrm>
-            <a:off x="9503188" y="6121400"/>
-            <a:ext cx="1926812" cy="165100"/>
+            <a:off x="9574308" y="6121400"/>
+            <a:ext cx="1855692" cy="184150"/>
           </a:xfrm>
           <a:prstGeom prst="rect">
             <a:avLst/>
@@ -6752,8 +6711,8 @@
         </p:nvSpPr>
         <p:spPr>
           <a:xfrm>
-            <a:off x="619101" y="6121400"/>
-            <a:ext cx="545529" cy="165100"/>
+            <a:off x="669846" y="6121400"/>
+            <a:ext cx="485854" cy="184150"/>
           </a:xfrm>
           <a:prstGeom prst="rect">
             <a:avLst/>
@@ -6819,8 +6778,8 @@
         </p:nvSpPr>
         <p:spPr>
           <a:xfrm>
-            <a:off x="10711160" y="508000"/>
-            <a:ext cx="718840" cy="273050"/>
+            <a:off x="10769600" y="508000"/>
+            <a:ext cx="660400" cy="298450"/>
           </a:xfrm>
           <a:prstGeom prst="rect">
             <a:avLst/>
@@ -6851,8 +6810,8 @@
         </p:nvSpPr>
         <p:spPr>
           <a:xfrm>
-            <a:off x="10636186" y="552450"/>
-            <a:ext cx="692214" cy="177800"/>
+            <a:off x="10730087" y="552450"/>
+            <a:ext cx="598313" cy="203200"/>
           </a:xfrm>
           <a:prstGeom prst="rect">
             <a:avLst/>
@@ -6916,9 +6875,9 @@
                 <a:solidFill>
                   <a:srgbClr val="12212F"/>
                 </a:solidFill>
-                <a:latin typeface="Times New Roman"/>
-                <a:ea typeface="Times New Roman"/>
-                <a:cs typeface="Times New Roman"/>
+                <a:latin typeface="Arial"/>
+                <a:ea typeface="Arial"/>
+                <a:cs typeface="Arial"/>
               </a:rPr>
               <a:t>המתודולוגיה: מהנחות עבודה להחלטה עסקית</a:t>
             </a:r>
@@ -6975,7 +6934,7 @@
         <p:spPr>
           <a:xfrm>
             <a:off x="9357420" y="2387600"/>
-            <a:ext cx="2072580" cy="2633067"/>
+            <a:ext cx="2072580" cy="2652117"/>
           </a:xfrm>
           <a:prstGeom prst="rect">
             <a:avLst/>
@@ -7009,7 +6968,7 @@
         <p:spPr>
           <a:xfrm>
             <a:off x="9363770" y="2393950"/>
-            <a:ext cx="2059880" cy="950714"/>
+            <a:ext cx="2059880" cy="969764"/>
           </a:xfrm>
           <a:prstGeom prst="rect">
             <a:avLst/>
@@ -7040,7 +6999,7 @@
         </p:nvSpPr>
         <p:spPr>
           <a:xfrm>
-            <a:off x="9363770" y="3338314"/>
+            <a:off x="9363770" y="3357364"/>
             <a:ext cx="2059880" cy="6350"/>
           </a:xfrm>
           <a:prstGeom prst="rect">
@@ -7108,8 +7067,8 @@
         </p:nvSpPr>
         <p:spPr>
           <a:xfrm>
-            <a:off x="10295334" y="2540000"/>
-            <a:ext cx="249936" cy="177800"/>
+            <a:off x="10292159" y="2540000"/>
+            <a:ext cx="272383" cy="177800"/>
           </a:xfrm>
           <a:prstGeom prst="rect">
             <a:avLst/>
@@ -7132,9 +7091,9 @@
                 <a:solidFill>
                   <a:srgbClr val="B44A22"/>
                 </a:solidFill>
-                <a:latin typeface="Times New Roman"/>
-                <a:ea typeface="Times New Roman"/>
-                <a:cs typeface="Times New Roman"/>
+                <a:latin typeface="Arial"/>
+                <a:ea typeface="Arial"/>
+                <a:cs typeface="Arial"/>
               </a:rPr>
               <a:t>01</a:t>
             </a:r>
@@ -7149,8 +7108,8 @@
         </p:nvSpPr>
         <p:spPr>
           <a:xfrm>
-            <a:off x="9749171" y="2851150"/>
-            <a:ext cx="1047814" cy="165100"/>
+            <a:off x="9858010" y="2851150"/>
+            <a:ext cx="891350" cy="184150"/>
           </a:xfrm>
           <a:prstGeom prst="rect">
             <a:avLst/>
@@ -7190,7 +7149,7 @@
         </p:nvSpPr>
         <p:spPr>
           <a:xfrm>
-            <a:off x="9440019" y="3073400"/>
+            <a:off x="9440019" y="3092450"/>
             <a:ext cx="1907480" cy="402828"/>
           </a:xfrm>
           <a:prstGeom prst="rect">
@@ -7231,7 +7190,7 @@
         </p:nvSpPr>
         <p:spPr>
           <a:xfrm>
-            <a:off x="9439970" y="3427214"/>
+            <a:off x="9439970" y="3446264"/>
             <a:ext cx="1907480" cy="198041"/>
           </a:xfrm>
           <a:prstGeom prst="rect">
@@ -7272,7 +7231,7 @@
         </p:nvSpPr>
         <p:spPr>
           <a:xfrm>
-            <a:off x="9439970" y="3663355"/>
+            <a:off x="9439970" y="3682405"/>
             <a:ext cx="1907480" cy="198041"/>
           </a:xfrm>
           <a:prstGeom prst="rect">
@@ -7313,7 +7272,7 @@
         </p:nvSpPr>
         <p:spPr>
           <a:xfrm>
-            <a:off x="9439970" y="3899495"/>
+            <a:off x="9439970" y="3918545"/>
             <a:ext cx="1907480" cy="198041"/>
           </a:xfrm>
           <a:prstGeom prst="rect">
@@ -7354,7 +7313,7 @@
         </p:nvSpPr>
         <p:spPr>
           <a:xfrm>
-            <a:off x="9439970" y="4135636"/>
+            <a:off x="9439970" y="4154686"/>
             <a:ext cx="1907480" cy="396081"/>
           </a:xfrm>
           <a:prstGeom prst="rect">
@@ -7395,7 +7354,7 @@
         </p:nvSpPr>
         <p:spPr>
           <a:xfrm>
-            <a:off x="9439970" y="4588867"/>
+            <a:off x="9439970" y="4607917"/>
             <a:ext cx="1907480" cy="342900"/>
           </a:xfrm>
           <a:prstGeom prst="rect">
@@ -7437,7 +7396,7 @@
         <p:spPr>
           <a:xfrm>
             <a:off x="7208540" y="2387600"/>
-            <a:ext cx="2072680" cy="2633067"/>
+            <a:ext cx="2072680" cy="2652117"/>
           </a:xfrm>
           <a:prstGeom prst="rect">
             <a:avLst/>
@@ -7471,7 +7430,7 @@
         <p:spPr>
           <a:xfrm>
             <a:off x="7214890" y="2393950"/>
-            <a:ext cx="2059980" cy="950714"/>
+            <a:ext cx="2059980" cy="969764"/>
           </a:xfrm>
           <a:prstGeom prst="rect">
             <a:avLst/>
@@ -7502,7 +7461,7 @@
         </p:nvSpPr>
         <p:spPr>
           <a:xfrm>
-            <a:off x="7214890" y="3338314"/>
+            <a:off x="7214890" y="3357364"/>
             <a:ext cx="2059980" cy="6350"/>
           </a:xfrm>
           <a:prstGeom prst="rect">
@@ -7570,8 +7529,8 @@
         </p:nvSpPr>
         <p:spPr>
           <a:xfrm>
-            <a:off x="8140105" y="2540000"/>
-            <a:ext cx="249936" cy="177800"/>
+            <a:off x="8143280" y="2540000"/>
+            <a:ext cx="272383" cy="177800"/>
           </a:xfrm>
           <a:prstGeom prst="rect">
             <a:avLst/>
@@ -7594,9 +7553,9 @@
                 <a:solidFill>
                   <a:srgbClr val="B44A22"/>
                 </a:solidFill>
-                <a:latin typeface="Times New Roman"/>
-                <a:ea typeface="Times New Roman"/>
-                <a:cs typeface="Times New Roman"/>
+                <a:latin typeface="Arial"/>
+                <a:ea typeface="Arial"/>
+                <a:cs typeface="Arial"/>
               </a:rPr>
               <a:t>02</a:t>
             </a:r>
@@ -7611,8 +7570,8 @@
         </p:nvSpPr>
         <p:spPr>
           <a:xfrm>
-            <a:off x="7624151" y="2851150"/>
-            <a:ext cx="989028" cy="165100"/>
+            <a:off x="7745690" y="2851150"/>
+            <a:ext cx="832564" cy="184150"/>
           </a:xfrm>
           <a:prstGeom prst="rect">
             <a:avLst/>
@@ -7652,7 +7611,7 @@
         </p:nvSpPr>
         <p:spPr>
           <a:xfrm>
-            <a:off x="7291090" y="3073400"/>
+            <a:off x="7291090" y="3092450"/>
             <a:ext cx="1907580" cy="402828"/>
           </a:xfrm>
           <a:prstGeom prst="rect">
@@ -7693,7 +7652,7 @@
         </p:nvSpPr>
         <p:spPr>
           <a:xfrm>
-            <a:off x="7291090" y="3427214"/>
+            <a:off x="7291090" y="3446264"/>
             <a:ext cx="1907580" cy="198041"/>
           </a:xfrm>
           <a:prstGeom prst="rect">
@@ -7734,7 +7693,7 @@
         </p:nvSpPr>
         <p:spPr>
           <a:xfrm>
-            <a:off x="7291090" y="3663355"/>
+            <a:off x="7291090" y="3682405"/>
             <a:ext cx="1907580" cy="198041"/>
           </a:xfrm>
           <a:prstGeom prst="rect">
@@ -7775,7 +7734,7 @@
         </p:nvSpPr>
         <p:spPr>
           <a:xfrm>
-            <a:off x="7291090" y="3899495"/>
+            <a:off x="7291090" y="3918545"/>
             <a:ext cx="1907580" cy="198041"/>
           </a:xfrm>
           <a:prstGeom prst="rect">
@@ -7816,7 +7775,7 @@
         </p:nvSpPr>
         <p:spPr>
           <a:xfrm>
-            <a:off x="7291090" y="4135636"/>
+            <a:off x="7291090" y="4154686"/>
             <a:ext cx="1907580" cy="198041"/>
           </a:xfrm>
           <a:prstGeom prst="rect">
@@ -7858,7 +7817,7 @@
         <p:spPr>
           <a:xfrm>
             <a:off x="5059759" y="2387600"/>
-            <a:ext cx="2072580" cy="2633067"/>
+            <a:ext cx="2072580" cy="2652117"/>
           </a:xfrm>
           <a:prstGeom prst="rect">
             <a:avLst/>
@@ -7892,7 +7851,7 @@
         <p:spPr>
           <a:xfrm>
             <a:off x="5066109" y="2393950"/>
-            <a:ext cx="2059880" cy="950714"/>
+            <a:ext cx="2059880" cy="969764"/>
           </a:xfrm>
           <a:prstGeom prst="rect">
             <a:avLst/>
@@ -7923,7 +7882,7 @@
         </p:nvSpPr>
         <p:spPr>
           <a:xfrm>
-            <a:off x="5066109" y="3338314"/>
+            <a:off x="5066109" y="3357364"/>
             <a:ext cx="2059880" cy="6350"/>
           </a:xfrm>
           <a:prstGeom prst="rect">
@@ -7991,8 +7950,8 @@
         </p:nvSpPr>
         <p:spPr>
           <a:xfrm>
-            <a:off x="5991324" y="2540000"/>
-            <a:ext cx="249936" cy="177800"/>
+            <a:off x="5994499" y="2540000"/>
+            <a:ext cx="272383" cy="177800"/>
           </a:xfrm>
           <a:prstGeom prst="rect">
             <a:avLst/>
@@ -8015,9 +7974,9 @@
                 <a:solidFill>
                   <a:srgbClr val="B44A22"/>
                 </a:solidFill>
-                <a:latin typeface="Times New Roman"/>
-                <a:ea typeface="Times New Roman"/>
-                <a:cs typeface="Times New Roman"/>
+                <a:latin typeface="Arial"/>
+                <a:ea typeface="Arial"/>
+                <a:cs typeface="Arial"/>
               </a:rPr>
               <a:t>03</a:t>
             </a:r>
@@ -8032,8 +7991,8 @@
         </p:nvSpPr>
         <p:spPr>
           <a:xfrm>
-            <a:off x="5787045" y="2851150"/>
-            <a:ext cx="486854" cy="165100"/>
+            <a:off x="5839115" y="2851150"/>
+            <a:ext cx="415734" cy="184150"/>
           </a:xfrm>
           <a:prstGeom prst="rect">
             <a:avLst/>
@@ -8073,7 +8032,7 @@
         </p:nvSpPr>
         <p:spPr>
           <a:xfrm>
-            <a:off x="5142359" y="3073400"/>
+            <a:off x="5142359" y="3092450"/>
             <a:ext cx="1907480" cy="402828"/>
           </a:xfrm>
           <a:prstGeom prst="rect">
@@ -8114,7 +8073,7 @@
         </p:nvSpPr>
         <p:spPr>
           <a:xfrm>
-            <a:off x="5142309" y="3427214"/>
+            <a:off x="5142309" y="3446264"/>
             <a:ext cx="1907480" cy="198041"/>
           </a:xfrm>
           <a:prstGeom prst="rect">
@@ -8177,7 +8136,7 @@
         </p:nvSpPr>
         <p:spPr>
           <a:xfrm>
-            <a:off x="5142309" y="3663355"/>
+            <a:off x="5142309" y="3682405"/>
             <a:ext cx="1907480" cy="198041"/>
           </a:xfrm>
           <a:prstGeom prst="rect">
@@ -8218,7 +8177,7 @@
         </p:nvSpPr>
         <p:spPr>
           <a:xfrm>
-            <a:off x="5142309" y="3899495"/>
+            <a:off x="5142309" y="3918545"/>
             <a:ext cx="1907480" cy="198041"/>
           </a:xfrm>
           <a:prstGeom prst="rect">
@@ -8259,7 +8218,7 @@
         </p:nvSpPr>
         <p:spPr>
           <a:xfrm>
-            <a:off x="5142309" y="4135636"/>
+            <a:off x="5142309" y="4154686"/>
             <a:ext cx="1907480" cy="198041"/>
           </a:xfrm>
           <a:prstGeom prst="rect">
@@ -8301,7 +8260,7 @@
         <p:spPr>
           <a:xfrm>
             <a:off x="2910880" y="2387600"/>
-            <a:ext cx="2072680" cy="2633067"/>
+            <a:ext cx="2072680" cy="2652117"/>
           </a:xfrm>
           <a:prstGeom prst="rect">
             <a:avLst/>
@@ -8335,7 +8294,7 @@
         <p:spPr>
           <a:xfrm>
             <a:off x="2917230" y="2393950"/>
-            <a:ext cx="2059980" cy="950714"/>
+            <a:ext cx="2059980" cy="969764"/>
           </a:xfrm>
           <a:prstGeom prst="rect">
             <a:avLst/>
@@ -8366,7 +8325,7 @@
         </p:nvSpPr>
         <p:spPr>
           <a:xfrm>
-            <a:off x="2917230" y="3338314"/>
+            <a:off x="2917230" y="3357364"/>
             <a:ext cx="2059980" cy="6350"/>
           </a:xfrm>
           <a:prstGeom prst="rect">
@@ -8434,8 +8393,8 @@
         </p:nvSpPr>
         <p:spPr>
           <a:xfrm>
-            <a:off x="3842445" y="2540000"/>
-            <a:ext cx="249936" cy="177800"/>
+            <a:off x="3845620" y="2540000"/>
+            <a:ext cx="272383" cy="177800"/>
           </a:xfrm>
           <a:prstGeom prst="rect">
             <a:avLst/>
@@ -8458,9 +8417,9 @@
                 <a:solidFill>
                   <a:srgbClr val="2E6A69"/>
                 </a:solidFill>
-                <a:latin typeface="Times New Roman"/>
-                <a:ea typeface="Times New Roman"/>
-                <a:cs typeface="Times New Roman"/>
+                <a:latin typeface="Arial"/>
+                <a:ea typeface="Arial"/>
+                <a:cs typeface="Arial"/>
               </a:rPr>
               <a:t>04</a:t>
             </a:r>
@@ -8475,8 +8434,8 @@
         </p:nvSpPr>
         <p:spPr>
           <a:xfrm>
-            <a:off x="3678376" y="2851150"/>
-            <a:ext cx="418068" cy="165100"/>
+            <a:off x="3716222" y="2851150"/>
+            <a:ext cx="361172" cy="184150"/>
           </a:xfrm>
           <a:prstGeom prst="rect">
             <a:avLst/>
@@ -8516,7 +8475,7 @@
         </p:nvSpPr>
         <p:spPr>
           <a:xfrm>
-            <a:off x="2993430" y="3073400"/>
+            <a:off x="2993430" y="3092450"/>
             <a:ext cx="1907580" cy="402828"/>
           </a:xfrm>
           <a:prstGeom prst="rect">
@@ -8557,7 +8516,7 @@
         </p:nvSpPr>
         <p:spPr>
           <a:xfrm>
-            <a:off x="2993430" y="3427214"/>
+            <a:off x="2993430" y="3446264"/>
             <a:ext cx="1907580" cy="198041"/>
           </a:xfrm>
           <a:prstGeom prst="rect">
@@ -8598,7 +8557,7 @@
         </p:nvSpPr>
         <p:spPr>
           <a:xfrm>
-            <a:off x="2993430" y="3663355"/>
+            <a:off x="2993430" y="3682405"/>
             <a:ext cx="1907580" cy="198041"/>
           </a:xfrm>
           <a:prstGeom prst="rect">
@@ -8639,7 +8598,7 @@
         </p:nvSpPr>
         <p:spPr>
           <a:xfrm>
-            <a:off x="2993430" y="3899495"/>
+            <a:off x="2993430" y="3918545"/>
             <a:ext cx="1907580" cy="198041"/>
           </a:xfrm>
           <a:prstGeom prst="rect">
@@ -8680,7 +8639,7 @@
         </p:nvSpPr>
         <p:spPr>
           <a:xfrm>
-            <a:off x="2993430" y="4135636"/>
+            <a:off x="2993430" y="4154686"/>
             <a:ext cx="1907580" cy="198041"/>
           </a:xfrm>
           <a:prstGeom prst="rect">
@@ -8722,7 +8681,7 @@
         <p:spPr>
           <a:xfrm>
             <a:off x="762099" y="2387600"/>
-            <a:ext cx="2072580" cy="2633067"/>
+            <a:ext cx="2072580" cy="2652117"/>
           </a:xfrm>
           <a:prstGeom prst="rect">
             <a:avLst/>
@@ -8756,7 +8715,7 @@
         <p:spPr>
           <a:xfrm>
             <a:off x="768449" y="2393950"/>
-            <a:ext cx="2059880" cy="950714"/>
+            <a:ext cx="2059880" cy="969764"/>
           </a:xfrm>
           <a:prstGeom prst="rect">
             <a:avLst/>
@@ -8787,7 +8746,7 @@
         </p:nvSpPr>
         <p:spPr>
           <a:xfrm>
-            <a:off x="768449" y="3338314"/>
+            <a:off x="768449" y="3357364"/>
             <a:ext cx="2059880" cy="6350"/>
           </a:xfrm>
           <a:prstGeom prst="rect">
@@ -8855,8 +8814,8 @@
         </p:nvSpPr>
         <p:spPr>
           <a:xfrm>
-            <a:off x="1693664" y="2540000"/>
-            <a:ext cx="249936" cy="177800"/>
+            <a:off x="1696839" y="2540000"/>
+            <a:ext cx="272383" cy="177800"/>
           </a:xfrm>
           <a:prstGeom prst="rect">
             <a:avLst/>
@@ -8879,9 +8838,9 @@
                 <a:solidFill>
                   <a:srgbClr val="2E6A69"/>
                 </a:solidFill>
-                <a:latin typeface="Times New Roman"/>
-                <a:ea typeface="Times New Roman"/>
-                <a:cs typeface="Times New Roman"/>
+                <a:latin typeface="Arial"/>
+                <a:ea typeface="Arial"/>
+                <a:cs typeface="Arial"/>
               </a:rPr>
               <a:t>05</a:t>
             </a:r>
@@ -8896,8 +8855,8 @@
         </p:nvSpPr>
         <p:spPr>
           <a:xfrm>
-            <a:off x="1433012" y="2851150"/>
-            <a:ext cx="574977" cy="165100"/>
+            <a:off x="1481907" y="2851150"/>
+            <a:ext cx="503857" cy="184150"/>
           </a:xfrm>
           <a:prstGeom prst="rect">
             <a:avLst/>
@@ -8937,7 +8896,7 @@
         </p:nvSpPr>
         <p:spPr>
           <a:xfrm>
-            <a:off x="851090" y="3073400"/>
+            <a:off x="851090" y="3092450"/>
             <a:ext cx="1894697" cy="201414"/>
           </a:xfrm>
           <a:prstGeom prst="rect">
@@ -8978,7 +8937,7 @@
         </p:nvSpPr>
         <p:spPr>
           <a:xfrm>
-            <a:off x="844649" y="3427214"/>
+            <a:off x="844649" y="3446264"/>
             <a:ext cx="1907480" cy="198041"/>
           </a:xfrm>
           <a:prstGeom prst="rect">
@@ -9019,7 +8978,7 @@
         </p:nvSpPr>
         <p:spPr>
           <a:xfrm>
-            <a:off x="844649" y="3663355"/>
+            <a:off x="844649" y="3682405"/>
             <a:ext cx="1907480" cy="198041"/>
           </a:xfrm>
           <a:prstGeom prst="rect">
@@ -9060,7 +9019,7 @@
         </p:nvSpPr>
         <p:spPr>
           <a:xfrm>
-            <a:off x="844649" y="3899495"/>
+            <a:off x="844649" y="3918545"/>
             <a:ext cx="1907480" cy="198041"/>
           </a:xfrm>
           <a:prstGeom prst="rect">
@@ -9101,7 +9060,7 @@
         </p:nvSpPr>
         <p:spPr>
           <a:xfrm>
-            <a:off x="844649" y="4135636"/>
+            <a:off x="844649" y="4154686"/>
             <a:ext cx="1907480" cy="198041"/>
           </a:xfrm>
           <a:prstGeom prst="rect">
@@ -9352,8 +9311,8 @@
         </p:nvSpPr>
         <p:spPr>
           <a:xfrm>
-            <a:off x="4504730" y="5334000"/>
-            <a:ext cx="351830" cy="254000"/>
+            <a:off x="4498380" y="5324475"/>
+            <a:ext cx="358180" cy="273050"/>
           </a:xfrm>
           <a:prstGeom prst="rect">
             <a:avLst/>
@@ -9384,8 +9343,8 @@
         </p:nvSpPr>
         <p:spPr>
           <a:xfrm>
-            <a:off x="4587280" y="5378450"/>
-            <a:ext cx="289163" cy="165100"/>
+            <a:off x="4580930" y="5368925"/>
+            <a:ext cx="289163" cy="184150"/>
           </a:xfrm>
           <a:prstGeom prst="rect">
             <a:avLst/>
@@ -9425,8 +9384,8 @@
         </p:nvSpPr>
         <p:spPr>
           <a:xfrm>
-            <a:off x="3811290" y="5334000"/>
-            <a:ext cx="642640" cy="254000"/>
+            <a:off x="3766840" y="5324475"/>
+            <a:ext cx="680740" cy="273050"/>
           </a:xfrm>
           <a:prstGeom prst="rect">
             <a:avLst/>
@@ -9457,8 +9416,8 @@
         </p:nvSpPr>
         <p:spPr>
           <a:xfrm>
-            <a:off x="3893840" y="5378450"/>
-            <a:ext cx="671100" cy="165100"/>
+            <a:off x="3849390" y="5368925"/>
+            <a:ext cx="671100" cy="184150"/>
           </a:xfrm>
           <a:prstGeom prst="rect">
             <a:avLst/>
@@ -9498,8 +9457,8 @@
         </p:nvSpPr>
         <p:spPr>
           <a:xfrm>
-            <a:off x="3266380" y="5334000"/>
-            <a:ext cx="494109" cy="254000"/>
+            <a:off x="3196530" y="5324475"/>
+            <a:ext cx="519509" cy="273050"/>
           </a:xfrm>
           <a:prstGeom prst="rect">
             <a:avLst/>
@@ -9530,8 +9489,8 @@
         </p:nvSpPr>
         <p:spPr>
           <a:xfrm>
-            <a:off x="3348930" y="5378450"/>
-            <a:ext cx="469741" cy="165100"/>
+            <a:off x="3279080" y="5368925"/>
+            <a:ext cx="469741" cy="184150"/>
           </a:xfrm>
           <a:prstGeom prst="rect">
             <a:avLst/>
@@ -9572,7 +9531,7 @@
         <p:spPr>
           <a:xfrm>
             <a:off x="889099" y="5289550"/>
-            <a:ext cx="2250281" cy="342900"/>
+            <a:ext cx="2180431" cy="342900"/>
           </a:xfrm>
           <a:prstGeom prst="rect">
             <a:avLst/>
@@ -9644,8 +9603,8 @@
         </p:nvSpPr>
         <p:spPr>
           <a:xfrm>
-            <a:off x="9675098" y="6121400"/>
-            <a:ext cx="1754902" cy="165100"/>
+            <a:off x="9746218" y="6121400"/>
+            <a:ext cx="1683782" cy="184150"/>
           </a:xfrm>
           <a:prstGeom prst="rect">
             <a:avLst/>
@@ -9685,8 +9644,8 @@
         </p:nvSpPr>
         <p:spPr>
           <a:xfrm>
-            <a:off x="619101" y="6121400"/>
-            <a:ext cx="545529" cy="165100"/>
+            <a:off x="669846" y="6121400"/>
+            <a:ext cx="485854" cy="184150"/>
           </a:xfrm>
           <a:prstGeom prst="rect">
             <a:avLst/>
@@ -9752,8 +9711,8 @@
         </p:nvSpPr>
         <p:spPr>
           <a:xfrm>
-            <a:off x="10452100" y="508000"/>
-            <a:ext cx="977900" cy="273050"/>
+            <a:off x="10553700" y="508000"/>
+            <a:ext cx="876300" cy="298450"/>
           </a:xfrm>
           <a:prstGeom prst="rect">
             <a:avLst/>
@@ -9784,8 +9743,8 @@
         </p:nvSpPr>
         <p:spPr>
           <a:xfrm>
-            <a:off x="10331037" y="552450"/>
-            <a:ext cx="997363" cy="177800"/>
+            <a:off x="10487501" y="552450"/>
+            <a:ext cx="840899" cy="203200"/>
           </a:xfrm>
           <a:prstGeom prst="rect">
             <a:avLst/>
@@ -9849,9 +9808,9 @@
                 <a:solidFill>
                   <a:srgbClr val="12212F"/>
                 </a:solidFill>
-                <a:latin typeface="Times New Roman"/>
-                <a:ea typeface="Times New Roman"/>
-                <a:cs typeface="Times New Roman"/>
+                <a:latin typeface="Arial"/>
+                <a:ea typeface="Arial"/>
+                <a:cs typeface="Arial"/>
               </a:rPr>
               <a:t>שתי דרכים לבחון את ההזדמנות</a:t>
             </a:r>
@@ -10088,7 +10047,7 @@
         <p:spPr>
           <a:xfrm>
             <a:off x="8896350" y="3535561"/>
-            <a:ext cx="2349500" cy="165100"/>
+            <a:ext cx="2349500" cy="184150"/>
           </a:xfrm>
           <a:prstGeom prst="rect">
             <a:avLst/>
@@ -10128,7 +10087,7 @@
         </p:nvSpPr>
         <p:spPr>
           <a:xfrm>
-            <a:off x="8896350" y="3751461"/>
+            <a:off x="8896350" y="3770511"/>
             <a:ext cx="2349500" cy="617041"/>
           </a:xfrm>
           <a:prstGeom prst="rect">
@@ -10170,7 +10129,7 @@
         <p:spPr>
           <a:xfrm>
             <a:off x="6369050" y="3535561"/>
-            <a:ext cx="2349500" cy="165100"/>
+            <a:ext cx="2349500" cy="184150"/>
           </a:xfrm>
           <a:prstGeom prst="rect">
             <a:avLst/>
@@ -10210,7 +10169,7 @@
         </p:nvSpPr>
         <p:spPr>
           <a:xfrm>
-            <a:off x="6369050" y="3751461"/>
+            <a:off x="6369050" y="3770511"/>
             <a:ext cx="2349500" cy="617041"/>
           </a:xfrm>
           <a:prstGeom prst="rect">
@@ -10251,7 +10210,7 @@
         </p:nvSpPr>
         <p:spPr>
           <a:xfrm>
-            <a:off x="6369050" y="4457402"/>
+            <a:off x="6369050" y="4476452"/>
             <a:ext cx="4876800" cy="351730"/>
           </a:xfrm>
           <a:prstGeom prst="rect">
@@ -10283,7 +10242,7 @@
         </p:nvSpPr>
         <p:spPr>
           <a:xfrm>
-            <a:off x="11220450" y="4457402"/>
+            <a:off x="11220450" y="4476452"/>
             <a:ext cx="25400" cy="351730"/>
           </a:xfrm>
           <a:prstGeom prst="rect">
@@ -10315,7 +10274,7 @@
         </p:nvSpPr>
         <p:spPr>
           <a:xfrm>
-            <a:off x="6483350" y="4527252"/>
+            <a:off x="6483350" y="4546302"/>
             <a:ext cx="4622800" cy="205680"/>
           </a:xfrm>
           <a:prstGeom prst="rect">
@@ -10388,8 +10347,8 @@
         </p:nvSpPr>
         <p:spPr>
           <a:xfrm>
-            <a:off x="10636250" y="5068689"/>
-            <a:ext cx="609600" cy="165100"/>
+            <a:off x="10636250" y="5049639"/>
+            <a:ext cx="609600" cy="184150"/>
           </a:xfrm>
           <a:prstGeom prst="rect">
             <a:avLst/>
@@ -10502,8 +10461,8 @@
         </p:nvSpPr>
         <p:spPr>
           <a:xfrm>
-            <a:off x="10636250" y="5420420"/>
-            <a:ext cx="609600" cy="165100"/>
+            <a:off x="10636250" y="5401370"/>
+            <a:ext cx="609600" cy="184150"/>
           </a:xfrm>
           <a:prstGeom prst="rect">
             <a:avLst/>
@@ -10765,7 +10724,7 @@
         <p:spPr>
           <a:xfrm>
             <a:off x="3473450" y="3535561"/>
-            <a:ext cx="2349500" cy="165100"/>
+            <a:ext cx="2349500" cy="184150"/>
           </a:xfrm>
           <a:prstGeom prst="rect">
             <a:avLst/>
@@ -10805,7 +10764,7 @@
         </p:nvSpPr>
         <p:spPr>
           <a:xfrm>
-            <a:off x="3473450" y="3751461"/>
+            <a:off x="3473450" y="3770511"/>
             <a:ext cx="2349500" cy="617041"/>
           </a:xfrm>
           <a:prstGeom prst="rect">
@@ -10847,7 +10806,7 @@
         <p:spPr>
           <a:xfrm>
             <a:off x="946150" y="3535561"/>
-            <a:ext cx="2349500" cy="165100"/>
+            <a:ext cx="2349500" cy="184150"/>
           </a:xfrm>
           <a:prstGeom prst="rect">
             <a:avLst/>
@@ -10887,7 +10846,7 @@
         </p:nvSpPr>
         <p:spPr>
           <a:xfrm>
-            <a:off x="946150" y="3751461"/>
+            <a:off x="946150" y="3770511"/>
             <a:ext cx="2349500" cy="411361"/>
           </a:xfrm>
           <a:prstGeom prst="rect">
@@ -10960,8 +10919,8 @@
         </p:nvSpPr>
         <p:spPr>
           <a:xfrm>
-            <a:off x="5213350" y="5068689"/>
-            <a:ext cx="609600" cy="165100"/>
+            <a:off x="5213350" y="5049639"/>
+            <a:ext cx="609600" cy="184150"/>
           </a:xfrm>
           <a:prstGeom prst="rect">
             <a:avLst/>
@@ -11074,8 +11033,8 @@
         </p:nvSpPr>
         <p:spPr>
           <a:xfrm>
-            <a:off x="5213350" y="5420420"/>
-            <a:ext cx="609600" cy="165100"/>
+            <a:off x="5213350" y="5401370"/>
+            <a:ext cx="609600" cy="184150"/>
           </a:xfrm>
           <a:prstGeom prst="rect">
             <a:avLst/>
@@ -11188,8 +11147,8 @@
         </p:nvSpPr>
         <p:spPr>
           <a:xfrm>
-            <a:off x="8467392" y="6121400"/>
-            <a:ext cx="2962608" cy="165100"/>
+            <a:off x="8578405" y="6121400"/>
+            <a:ext cx="2851595" cy="184150"/>
           </a:xfrm>
           <a:prstGeom prst="rect">
             <a:avLst/>
@@ -11229,8 +11188,8 @@
         </p:nvSpPr>
         <p:spPr>
           <a:xfrm>
-            <a:off x="619101" y="6121400"/>
-            <a:ext cx="545529" cy="165100"/>
+            <a:off x="669846" y="6121400"/>
+            <a:ext cx="485854" cy="184150"/>
           </a:xfrm>
           <a:prstGeom prst="rect">
             <a:avLst/>
@@ -11296,8 +11255,8 @@
         </p:nvSpPr>
         <p:spPr>
           <a:xfrm>
-            <a:off x="10896600" y="508000"/>
-            <a:ext cx="533400" cy="273050"/>
+            <a:off x="10941050" y="508000"/>
+            <a:ext cx="488950" cy="298450"/>
           </a:xfrm>
           <a:prstGeom prst="rect">
             <a:avLst/>
@@ -11328,8 +11287,8 @@
         </p:nvSpPr>
         <p:spPr>
           <a:xfrm>
-            <a:off x="10877106" y="552450"/>
-            <a:ext cx="451295" cy="177800"/>
+            <a:off x="10955338" y="552450"/>
+            <a:ext cx="373063" cy="203200"/>
           </a:xfrm>
           <a:prstGeom prst="rect">
             <a:avLst/>
@@ -11393,9 +11352,9 @@
                 <a:solidFill>
                   <a:srgbClr val="12212F"/>
                 </a:solidFill>
-                <a:latin typeface="Times New Roman"/>
-                <a:ea typeface="Times New Roman"/>
-                <a:cs typeface="Times New Roman"/>
+                <a:latin typeface="Arial"/>
+                <a:ea typeface="Arial"/>
+                <a:cs typeface="Arial"/>
               </a:rPr>
               <a:t>מה חשוב שנבין היום?</a:t>
             </a:r>
@@ -11494,7 +11453,7 @@
           <a:noFill/>
         </p:spPr>
         <p:txBody>
-          <a:bodyPr wrap="square" lIns="0" rIns="0" tIns="0" bIns="0" anchor="t">
+          <a:bodyPr wrap="square" lIns="0" rIns="0" tIns="0" bIns="0" anchor="ctr">
             <a:noAutofit/>
           </a:bodyPr>
           <a:lstStyle/>
@@ -11509,9 +11468,9 @@
                 <a:solidFill>
                   <a:srgbClr val="41586C"/>
                 </a:solidFill>
-                <a:latin typeface="Times New Roman"/>
-                <a:ea typeface="Times New Roman"/>
-                <a:cs typeface="Times New Roman"/>
+                <a:latin typeface="Arial"/>
+                <a:ea typeface="Arial"/>
+                <a:cs typeface="Arial"/>
               </a:rPr>
               <a:t>01</a:t>
             </a:r>
@@ -11610,7 +11569,7 @@
           <a:noFill/>
         </p:spPr>
         <p:txBody>
-          <a:bodyPr wrap="square" lIns="0" rIns="0" tIns="0" bIns="0" anchor="t">
+          <a:bodyPr wrap="square" lIns="0" rIns="0" tIns="0" bIns="0" anchor="ctr">
             <a:noAutofit/>
           </a:bodyPr>
           <a:lstStyle/>
@@ -11625,9 +11584,9 @@
                 <a:solidFill>
                   <a:srgbClr val="41586C"/>
                 </a:solidFill>
-                <a:latin typeface="Times New Roman"/>
-                <a:ea typeface="Times New Roman"/>
-                <a:cs typeface="Times New Roman"/>
+                <a:latin typeface="Arial"/>
+                <a:ea typeface="Arial"/>
+                <a:cs typeface="Arial"/>
               </a:rPr>
               <a:t>02</a:t>
             </a:r>
@@ -11726,7 +11685,7 @@
           <a:noFill/>
         </p:spPr>
         <p:txBody>
-          <a:bodyPr wrap="square" lIns="0" rIns="0" tIns="0" bIns="0" anchor="t">
+          <a:bodyPr wrap="square" lIns="0" rIns="0" tIns="0" bIns="0" anchor="ctr">
             <a:noAutofit/>
           </a:bodyPr>
           <a:lstStyle/>
@@ -11741,9 +11700,9 @@
                 <a:solidFill>
                   <a:srgbClr val="41586C"/>
                 </a:solidFill>
-                <a:latin typeface="Times New Roman"/>
-                <a:ea typeface="Times New Roman"/>
-                <a:cs typeface="Times New Roman"/>
+                <a:latin typeface="Arial"/>
+                <a:ea typeface="Arial"/>
+                <a:cs typeface="Arial"/>
               </a:rPr>
               <a:t>03</a:t>
             </a:r>
@@ -11842,7 +11801,7 @@
           <a:noFill/>
         </p:spPr>
         <p:txBody>
-          <a:bodyPr wrap="square" lIns="0" rIns="0" tIns="0" bIns="0" anchor="t">
+          <a:bodyPr wrap="square" lIns="0" rIns="0" tIns="0" bIns="0" anchor="ctr">
             <a:noAutofit/>
           </a:bodyPr>
           <a:lstStyle/>
@@ -11857,9 +11816,9 @@
                 <a:solidFill>
                   <a:srgbClr val="41586C"/>
                 </a:solidFill>
-                <a:latin typeface="Times New Roman"/>
-                <a:ea typeface="Times New Roman"/>
-                <a:cs typeface="Times New Roman"/>
+                <a:latin typeface="Arial"/>
+                <a:ea typeface="Arial"/>
+                <a:cs typeface="Arial"/>
               </a:rPr>
               <a:t>04</a:t>
             </a:r>
@@ -11992,7 +11951,7 @@
           <a:noFill/>
         </p:spPr>
         <p:txBody>
-          <a:bodyPr wrap="square" lIns="0" rIns="0" tIns="0" bIns="0" anchor="t">
+          <a:bodyPr wrap="square" lIns="0" rIns="0" tIns="0" bIns="0" anchor="ctr">
             <a:noAutofit/>
           </a:bodyPr>
           <a:lstStyle/>
@@ -12007,9 +11966,9 @@
                 <a:solidFill>
                   <a:srgbClr val="FFFFFF"/>
                 </a:solidFill>
-                <a:latin typeface="Times New Roman"/>
-                <a:ea typeface="Times New Roman"/>
-                <a:cs typeface="Times New Roman"/>
+                <a:latin typeface="Arial"/>
+                <a:ea typeface="Arial"/>
+                <a:cs typeface="Arial"/>
               </a:rPr>
               <a:t>05</a:t>
             </a:r>
@@ -12097,8 +12056,8 @@
         </p:nvSpPr>
         <p:spPr>
           <a:xfrm>
-            <a:off x="10120598" y="6121400"/>
-            <a:ext cx="1309402" cy="165100"/>
+            <a:off x="10174605" y="6121400"/>
+            <a:ext cx="1255395" cy="184150"/>
           </a:xfrm>
           <a:prstGeom prst="rect">
             <a:avLst/>
@@ -12138,8 +12097,8 @@
         </p:nvSpPr>
         <p:spPr>
           <a:xfrm>
-            <a:off x="619101" y="6121400"/>
-            <a:ext cx="545529" cy="165100"/>
+            <a:off x="669846" y="6121400"/>
+            <a:ext cx="485854" cy="184150"/>
           </a:xfrm>
           <a:prstGeom prst="rect">
             <a:avLst/>
@@ -12205,8 +12164,8 @@
         </p:nvSpPr>
         <p:spPr>
           <a:xfrm>
-            <a:off x="10374610" y="508000"/>
-            <a:ext cx="1055390" cy="273050"/>
+            <a:off x="10458450" y="508000"/>
+            <a:ext cx="971550" cy="298450"/>
           </a:xfrm>
           <a:prstGeom prst="rect">
             <a:avLst/>
@@ -12237,8 +12196,8 @@
         </p:nvSpPr>
         <p:spPr>
           <a:xfrm>
-            <a:off x="10208244" y="552450"/>
-            <a:ext cx="1120156" cy="177800"/>
+            <a:off x="10380377" y="552450"/>
+            <a:ext cx="948023" cy="203200"/>
           </a:xfrm>
           <a:prstGeom prst="rect">
             <a:avLst/>
@@ -12302,9 +12261,9 @@
                 <a:solidFill>
                   <a:srgbClr val="12212F"/>
                 </a:solidFill>
-                <a:latin typeface="Times New Roman"/>
-                <a:ea typeface="Times New Roman"/>
-                <a:cs typeface="Times New Roman"/>
+                <a:latin typeface="Arial"/>
+                <a:ea typeface="Arial"/>
+                <a:cs typeface="Arial"/>
               </a:rPr>
               <a:t>מסגרת התקשרות</a:t>
             </a:r>
@@ -12347,7 +12306,7 @@
                 <a:ea typeface="Arial"/>
                 <a:cs typeface="Arial"/>
               </a:rPr>
-              <a:t>תמחור שעתי שקוף. היקף העבודה נגזר מהמסלול שנבחר ומחלוקת המשימות בין הצדדים.</a:t>
+              <a:t>התעריף זהה בשני המסלולים; היקף העבודה נגזר מאופי התהליך ומחלוקת המשימות.</a:t>
             </a:r>
           </a:p>
         </p:txBody>
@@ -12361,7 +12320,7 @@
         <p:spPr>
           <a:xfrm>
             <a:off x="762000" y="2387600"/>
-            <a:ext cx="10668000" cy="942280"/>
+            <a:ext cx="10668000" cy="808930"/>
           </a:xfrm>
           <a:prstGeom prst="rect">
             <a:avLst/>
@@ -12392,8 +12351,8 @@
         </p:nvSpPr>
         <p:spPr>
           <a:xfrm>
-            <a:off x="10658459" y="2889250"/>
-            <a:ext cx="555641" cy="165100"/>
+            <a:off x="10758027" y="2774950"/>
+            <a:ext cx="456073" cy="184150"/>
           </a:xfrm>
           <a:prstGeom prst="rect">
             <a:avLst/>
@@ -12433,8 +12392,8 @@
         </p:nvSpPr>
         <p:spPr>
           <a:xfrm>
-            <a:off x="9683750" y="2552700"/>
-            <a:ext cx="989584" cy="586680"/>
+            <a:off x="9963150" y="2552700"/>
+            <a:ext cx="857790" cy="453330"/>
           </a:xfrm>
           <a:prstGeom prst="rect">
             <a:avLst/>
@@ -12449,17 +12408,17 @@
           <a:p>
             <a:pPr algn="l" rtl="0">
               <a:lnSpc>
-                <a:spcPts val="4620"/>
-              </a:lnSpc>
-            </a:pPr>
-            <a:r>
-              <a:rPr sz="4400" b="1">
+                <a:spcPts val="3570"/>
+              </a:lnSpc>
+            </a:pPr>
+            <a:r>
+              <a:rPr sz="3400" b="1">
                 <a:solidFill>
                   <a:srgbClr val="FFFFFF"/>
                 </a:solidFill>
-                <a:latin typeface="Times New Roman"/>
-                <a:ea typeface="Times New Roman"/>
-                <a:cs typeface="Times New Roman"/>
+                <a:latin typeface="Arial"/>
+                <a:ea typeface="Arial"/>
+                <a:cs typeface="Arial"/>
               </a:rPr>
               <a:t>450</a:t>
             </a:r>
@@ -12474,33 +12433,33 @@
         </p:nvSpPr>
         <p:spPr>
           <a:xfrm>
-            <a:off x="9388364" y="2800350"/>
-            <a:ext cx="206486" cy="292100"/>
-          </a:xfrm>
-          <a:prstGeom prst="rect">
-            <a:avLst/>
-          </a:prstGeom>
-          <a:noFill/>
-        </p:spPr>
-        <p:txBody>
-          <a:bodyPr wrap="square" lIns="0" rIns="0" tIns="0" bIns="0" anchor="t">
-            <a:noAutofit/>
-          </a:bodyPr>
-          <a:lstStyle/>
-          <a:p>
-            <a:pPr algn="r" rtl="1">
-              <a:lnSpc>
-                <a:spcPts val="2160"/>
-              </a:lnSpc>
-            </a:pPr>
-            <a:r>
-              <a:rPr sz="1800" b="1">
+            <a:off x="9647428" y="2724150"/>
+            <a:ext cx="226822" cy="260350"/>
+          </a:xfrm>
+          <a:prstGeom prst="rect">
+            <a:avLst/>
+          </a:prstGeom>
+          <a:noFill/>
+        </p:spPr>
+        <p:txBody>
+          <a:bodyPr wrap="square" lIns="0" rIns="0" tIns="0" bIns="0" anchor="t">
+            <a:noAutofit/>
+          </a:bodyPr>
+          <a:lstStyle/>
+          <a:p>
+            <a:pPr algn="r" rtl="1">
+              <a:lnSpc>
+                <a:spcPts val="1680"/>
+              </a:lnSpc>
+            </a:pPr>
+            <a:r>
+              <a:rPr sz="1400" b="1">
                 <a:solidFill>
                   <a:srgbClr val="FFFFFF"/>
                 </a:solidFill>
-                <a:latin typeface="Times New Roman"/>
-                <a:ea typeface="Times New Roman"/>
-                <a:cs typeface="Times New Roman"/>
+                <a:latin typeface="Arial"/>
+                <a:ea typeface="Arial"/>
+                <a:cs typeface="Arial"/>
               </a:rPr>
               <a:t>₪</a:t>
             </a:r>
@@ -12515,8 +12474,8 @@
         </p:nvSpPr>
         <p:spPr>
           <a:xfrm>
-            <a:off x="8632682" y="2832100"/>
-            <a:ext cx="727218" cy="234950"/>
+            <a:off x="8893032" y="2724150"/>
+            <a:ext cx="727218" cy="260350"/>
           </a:xfrm>
           <a:prstGeom prst="rect">
             <a:avLst/>
@@ -12556,8 +12515,8 @@
         </p:nvSpPr>
         <p:spPr>
           <a:xfrm>
-            <a:off x="7760414" y="2844800"/>
-            <a:ext cx="913686" cy="215900"/>
+            <a:off x="8001714" y="2736850"/>
+            <a:ext cx="913686" cy="241300"/>
           </a:xfrm>
           <a:prstGeom prst="rect">
             <a:avLst/>
@@ -12597,8 +12556,8 @@
         </p:nvSpPr>
         <p:spPr>
           <a:xfrm>
-            <a:off x="481108" y="2857500"/>
-            <a:ext cx="2122392" cy="203200"/>
+            <a:off x="639858" y="2749550"/>
+            <a:ext cx="2122392" cy="222250"/>
           </a:xfrm>
           <a:prstGeom prst="rect">
             <a:avLst/>
@@ -12638,8 +12597,8 @@
         </p:nvSpPr>
         <p:spPr>
           <a:xfrm>
-            <a:off x="6184900" y="3494980"/>
-            <a:ext cx="5245100" cy="1635224"/>
+            <a:off x="6184900" y="3361630"/>
+            <a:ext cx="5245100" cy="1768574"/>
           </a:xfrm>
           <a:prstGeom prst="rect">
             <a:avLst/>
@@ -12670,7 +12629,7 @@
         </p:nvSpPr>
         <p:spPr>
           <a:xfrm>
-            <a:off x="6184900" y="3494980"/>
+            <a:off x="6184900" y="3361630"/>
             <a:ext cx="5245100" cy="31750"/>
           </a:xfrm>
           <a:prstGeom prst="rect">
@@ -12734,8 +12693,8 @@
         </p:nvSpPr>
         <p:spPr>
           <a:xfrm>
-            <a:off x="6184900" y="3494980"/>
-            <a:ext cx="6350" cy="1635224"/>
+            <a:off x="6184900" y="3361630"/>
+            <a:ext cx="6350" cy="1768574"/>
           </a:xfrm>
           <a:prstGeom prst="rect">
             <a:avLst/>
@@ -12766,8 +12725,8 @@
         </p:nvSpPr>
         <p:spPr>
           <a:xfrm>
-            <a:off x="11423650" y="3494980"/>
-            <a:ext cx="6350" cy="1635224"/>
+            <a:off x="11423650" y="3361630"/>
+            <a:ext cx="6350" cy="1768574"/>
           </a:xfrm>
           <a:prstGeom prst="rect">
             <a:avLst/>
@@ -12798,7 +12757,7 @@
         </p:nvSpPr>
         <p:spPr>
           <a:xfrm>
-            <a:off x="6369050" y="3990280"/>
+            <a:off x="6369050" y="3856930"/>
             <a:ext cx="4876800" cy="6350"/>
           </a:xfrm>
           <a:prstGeom prst="rect">
@@ -12830,7 +12789,7 @@
         </p:nvSpPr>
         <p:spPr>
           <a:xfrm>
-            <a:off x="6369050" y="3679130"/>
+            <a:off x="6369050" y="3545780"/>
             <a:ext cx="4876800" cy="222250"/>
           </a:xfrm>
           <a:prstGeom prst="rect">
@@ -12871,8 +12830,8 @@
         </p:nvSpPr>
         <p:spPr>
           <a:xfrm>
-            <a:off x="6369050" y="4098230"/>
-            <a:ext cx="4876800" cy="165100"/>
+            <a:off x="6369050" y="3964880"/>
+            <a:ext cx="4876800" cy="184150"/>
           </a:xfrm>
           <a:prstGeom prst="rect">
             <a:avLst/>
@@ -12912,7 +12871,7 @@
         </p:nvSpPr>
         <p:spPr>
           <a:xfrm>
-            <a:off x="6369050" y="4301430"/>
+            <a:off x="6369050" y="4187130"/>
             <a:ext cx="4876800" cy="285750"/>
           </a:xfrm>
           <a:prstGeom prst="rect">
@@ -12936,9 +12895,9 @@
                 <a:solidFill>
                   <a:srgbClr val="B44A22"/>
                 </a:solidFill>
-                <a:latin typeface="Times New Roman"/>
-                <a:ea typeface="Times New Roman"/>
-                <a:cs typeface="Times New Roman"/>
+                <a:latin typeface="Arial"/>
+                <a:ea typeface="Arial"/>
+                <a:cs typeface="Arial"/>
               </a:rPr>
               <a:t>כ־</a:t>
             </a:r>
@@ -12947,9 +12906,9 @@
                 <a:solidFill>
                   <a:srgbClr val="B44A22"/>
                 </a:solidFill>
-                <a:latin typeface="Times New Roman"/>
-                <a:ea typeface="Times New Roman"/>
-                <a:cs typeface="Times New Roman"/>
+                <a:latin typeface="Arial"/>
+                <a:ea typeface="Arial"/>
+                <a:cs typeface="Arial"/>
               </a:rPr>
               <a:t>⁦20–40⁩</a:t>
             </a:r>
@@ -12958,9 +12917,9 @@
                 <a:solidFill>
                   <a:srgbClr val="B44A22"/>
                 </a:solidFill>
-                <a:latin typeface="Times New Roman"/>
-                <a:ea typeface="Times New Roman"/>
-                <a:cs typeface="Times New Roman"/>
+                <a:latin typeface="Arial"/>
+                <a:ea typeface="Arial"/>
+                <a:cs typeface="Arial"/>
               </a:rPr>
               <a:t> שעות</a:t>
             </a:r>
@@ -13016,8 +12975,8 @@
         </p:nvSpPr>
         <p:spPr>
           <a:xfrm>
-            <a:off x="762000" y="3494980"/>
-            <a:ext cx="5245100" cy="1635224"/>
+            <a:off x="762000" y="3361630"/>
+            <a:ext cx="5245100" cy="1768574"/>
           </a:xfrm>
           <a:prstGeom prst="rect">
             <a:avLst/>
@@ -13048,7 +13007,7 @@
         </p:nvSpPr>
         <p:spPr>
           <a:xfrm>
-            <a:off x="762000" y="3494980"/>
+            <a:off x="762000" y="3361630"/>
             <a:ext cx="5245100" cy="31750"/>
           </a:xfrm>
           <a:prstGeom prst="rect">
@@ -13112,8 +13071,8 @@
         </p:nvSpPr>
         <p:spPr>
           <a:xfrm>
-            <a:off x="762000" y="3494980"/>
-            <a:ext cx="6350" cy="1635224"/>
+            <a:off x="762000" y="3361630"/>
+            <a:ext cx="6350" cy="1768574"/>
           </a:xfrm>
           <a:prstGeom prst="rect">
             <a:avLst/>
@@ -13144,8 +13103,8 @@
         </p:nvSpPr>
         <p:spPr>
           <a:xfrm>
-            <a:off x="6000750" y="3494980"/>
-            <a:ext cx="6350" cy="1635224"/>
+            <a:off x="6000750" y="3361630"/>
+            <a:ext cx="6350" cy="1768574"/>
           </a:xfrm>
           <a:prstGeom prst="rect">
             <a:avLst/>
@@ -13176,7 +13135,7 @@
         </p:nvSpPr>
         <p:spPr>
           <a:xfrm>
-            <a:off x="946150" y="3990280"/>
+            <a:off x="946150" y="3856930"/>
             <a:ext cx="4876800" cy="6350"/>
           </a:xfrm>
           <a:prstGeom prst="rect">
@@ -13208,7 +13167,7 @@
         </p:nvSpPr>
         <p:spPr>
           <a:xfrm>
-            <a:off x="946150" y="3679130"/>
+            <a:off x="946150" y="3545780"/>
             <a:ext cx="4876800" cy="222250"/>
           </a:xfrm>
           <a:prstGeom prst="rect">
@@ -13249,8 +13208,8 @@
         </p:nvSpPr>
         <p:spPr>
           <a:xfrm>
-            <a:off x="946150" y="4098230"/>
-            <a:ext cx="4876800" cy="165100"/>
+            <a:off x="946150" y="3964880"/>
+            <a:ext cx="4876800" cy="184150"/>
           </a:xfrm>
           <a:prstGeom prst="rect">
             <a:avLst/>
@@ -13290,7 +13249,7 @@
         </p:nvSpPr>
         <p:spPr>
           <a:xfrm>
-            <a:off x="946150" y="4301430"/>
+            <a:off x="946150" y="4187130"/>
             <a:ext cx="4876800" cy="222250"/>
           </a:xfrm>
           <a:prstGeom prst="rect">
@@ -13314,9 +13273,9 @@
                 <a:solidFill>
                   <a:srgbClr val="2E6A69"/>
                 </a:solidFill>
-                <a:latin typeface="Times New Roman"/>
-                <a:ea typeface="Times New Roman"/>
-                <a:cs typeface="Times New Roman"/>
+                <a:latin typeface="Arial"/>
+                <a:ea typeface="Arial"/>
+                <a:cs typeface="Arial"/>
               </a:rPr>
               <a:t>יוגדר לאחר פגישת המיפוי</a:t>
             </a:r>
@@ -13531,8 +13490,8 @@
         </p:nvSpPr>
         <p:spPr>
           <a:xfrm>
-            <a:off x="8514509" y="6121400"/>
-            <a:ext cx="2915491" cy="165100"/>
+            <a:off x="8631079" y="6121400"/>
+            <a:ext cx="2798921" cy="184150"/>
           </a:xfrm>
           <a:prstGeom prst="rect">
             <a:avLst/>
@@ -13572,8 +13531,8 @@
         </p:nvSpPr>
         <p:spPr>
           <a:xfrm>
-            <a:off x="619101" y="6121400"/>
-            <a:ext cx="545529" cy="165100"/>
+            <a:off x="669846" y="6121400"/>
+            <a:ext cx="485854" cy="184150"/>
           </a:xfrm>
           <a:prstGeom prst="rect">
             <a:avLst/>
@@ -13639,8 +13598,8 @@
         </p:nvSpPr>
         <p:spPr>
           <a:xfrm>
-            <a:off x="10323810" y="508000"/>
-            <a:ext cx="1106190" cy="273050"/>
+            <a:off x="10420350" y="508000"/>
+            <a:ext cx="1009650" cy="298450"/>
           </a:xfrm>
           <a:prstGeom prst="rect">
             <a:avLst/>
@@ -13671,8 +13630,8 @@
         </p:nvSpPr>
         <p:spPr>
           <a:xfrm>
-            <a:off x="10152793" y="552450"/>
-            <a:ext cx="1175607" cy="177800"/>
+            <a:off x="10324814" y="552450"/>
+            <a:ext cx="1003586" cy="203200"/>
           </a:xfrm>
           <a:prstGeom prst="rect">
             <a:avLst/>
@@ -13736,9 +13695,9 @@
                 <a:solidFill>
                   <a:srgbClr val="12212F"/>
                 </a:solidFill>
-                <a:latin typeface="Times New Roman"/>
-                <a:ea typeface="Times New Roman"/>
-                <a:cs typeface="Times New Roman"/>
+                <a:latin typeface="Arial"/>
+                <a:ea typeface="Arial"/>
+                <a:cs typeface="Arial"/>
               </a:rPr>
               <a:t>איך מתקדמים מכאן?</a:t>
             </a:r>
@@ -13867,7 +13826,7 @@
           <a:noFill/>
         </p:spPr>
         <p:txBody>
-          <a:bodyPr wrap="square" lIns="0" rIns="0" tIns="0" bIns="0" anchor="t">
+          <a:bodyPr wrap="square" lIns="0" rIns="0" tIns="0" bIns="0" anchor="ctr">
             <a:noAutofit/>
           </a:bodyPr>
           <a:lstStyle/>
@@ -13882,9 +13841,9 @@
                 <a:solidFill>
                   <a:srgbClr val="FFFFFF"/>
                 </a:solidFill>
-                <a:latin typeface="Times New Roman"/>
-                <a:ea typeface="Times New Roman"/>
-                <a:cs typeface="Times New Roman"/>
+                <a:latin typeface="Arial"/>
+                <a:ea typeface="Arial"/>
+                <a:cs typeface="Arial"/>
               </a:rPr>
               <a:t>01</a:t>
             </a:r>
@@ -14013,7 +13972,7 @@
           <a:noFill/>
         </p:spPr>
         <p:txBody>
-          <a:bodyPr wrap="square" lIns="0" rIns="0" tIns="0" bIns="0" anchor="t">
+          <a:bodyPr wrap="square" lIns="0" rIns="0" tIns="0" bIns="0" anchor="ctr">
             <a:noAutofit/>
           </a:bodyPr>
           <a:lstStyle/>
@@ -14028,9 +13987,9 @@
                 <a:solidFill>
                   <a:srgbClr val="FFFFFF"/>
                 </a:solidFill>
-                <a:latin typeface="Times New Roman"/>
-                <a:ea typeface="Times New Roman"/>
-                <a:cs typeface="Times New Roman"/>
+                <a:latin typeface="Arial"/>
+                <a:ea typeface="Arial"/>
+                <a:cs typeface="Arial"/>
               </a:rPr>
               <a:t>02</a:t>
             </a:r>
@@ -14159,7 +14118,7 @@
           <a:noFill/>
         </p:spPr>
         <p:txBody>
-          <a:bodyPr wrap="square" lIns="0" rIns="0" tIns="0" bIns="0" anchor="t">
+          <a:bodyPr wrap="square" lIns="0" rIns="0" tIns="0" bIns="0" anchor="ctr">
             <a:noAutofit/>
           </a:bodyPr>
           <a:lstStyle/>
@@ -14174,9 +14133,9 @@
                 <a:solidFill>
                   <a:srgbClr val="FFFFFF"/>
                 </a:solidFill>
-                <a:latin typeface="Times New Roman"/>
-                <a:ea typeface="Times New Roman"/>
-                <a:cs typeface="Times New Roman"/>
+                <a:latin typeface="Arial"/>
+                <a:ea typeface="Arial"/>
+                <a:cs typeface="Arial"/>
               </a:rPr>
               <a:t>03</a:t>
             </a:r>
@@ -14327,7 +14286,7 @@
           <a:noFill/>
         </p:spPr>
         <p:txBody>
-          <a:bodyPr wrap="square" lIns="0" rIns="0" tIns="0" bIns="0" anchor="t">
+          <a:bodyPr wrap="square" lIns="0" rIns="0" tIns="0" bIns="0" anchor="ctr">
             <a:noAutofit/>
           </a:bodyPr>
           <a:lstStyle/>
@@ -14342,9 +14301,9 @@
                 <a:solidFill>
                   <a:srgbClr val="2E6A69"/>
                 </a:solidFill>
-                <a:latin typeface="Times New Roman"/>
-                <a:ea typeface="Times New Roman"/>
-                <a:cs typeface="Times New Roman"/>
+                <a:latin typeface="Arial"/>
+                <a:ea typeface="Arial"/>
+                <a:cs typeface="Arial"/>
               </a:rPr>
               <a:t>04</a:t>
             </a:r>
@@ -14432,8 +14391,8 @@
         </p:nvSpPr>
         <p:spPr>
           <a:xfrm>
-            <a:off x="10120598" y="6121400"/>
-            <a:ext cx="1309402" cy="165100"/>
+            <a:off x="10174605" y="6121400"/>
+            <a:ext cx="1255395" cy="184150"/>
           </a:xfrm>
           <a:prstGeom prst="rect">
             <a:avLst/>
@@ -14473,8 +14432,8 @@
         </p:nvSpPr>
         <p:spPr>
           <a:xfrm>
-            <a:off x="619101" y="6121400"/>
-            <a:ext cx="545529" cy="165100"/>
+            <a:off x="669846" y="6121400"/>
+            <a:ext cx="485854" cy="184150"/>
           </a:xfrm>
           <a:prstGeom prst="rect">
             <a:avLst/>

--- a/dist/deck.pptx
+++ b/dist/deck.pptx
@@ -6584,7 +6584,7 @@
                 <a:ea typeface="Arial"/>
                 <a:cs typeface="Arial"/>
               </a:rPr>
-              <a:t>מה צריך לקרות לפני פיתוח?</a:t>
+              <a:t>מה צריך להיות סגור לפני שמתחילים לפתח?</a:t>
             </a:r>
           </a:p>
         </p:txBody>
@@ -6625,7 +6625,7 @@
                 <a:ea typeface="Arial"/>
                 <a:cs typeface="Arial"/>
               </a:rPr>
-              <a:t>אילו משאבים, בעלוּת ואבני דרך נדרשים?</a:t>
+              <a:t>מי מוביל, מהי חלוקת התפקידים, אילו משאבים נדרשים ומהן אבני הדרך הנדרשות?</a:t>
             </a:r>
           </a:p>
         </p:txBody>
@@ -12550,48 +12550,7 @@
       </p:sp>
       <p:sp>
         <p:nvSpPr>
-          <p:cNvPr id="12" name="TextBox 11"/>
-          <p:cNvSpPr txBox="1"/>
-          <p:nvPr/>
-        </p:nvSpPr>
-        <p:spPr>
-          <a:xfrm>
-            <a:off x="639858" y="2749550"/>
-            <a:ext cx="2122392" cy="222250"/>
-          </a:xfrm>
-          <a:prstGeom prst="rect">
-            <a:avLst/>
-          </a:prstGeom>
-          <a:noFill/>
-        </p:spPr>
-        <p:txBody>
-          <a:bodyPr wrap="square" lIns="0" rIns="0" tIns="0" bIns="0" anchor="t">
-            <a:noAutofit/>
-          </a:bodyPr>
-          <a:lstStyle/>
-          <a:p>
-            <a:pPr algn="r" rtl="1">
-              <a:lnSpc>
-                <a:spcPts val="1440"/>
-              </a:lnSpc>
-            </a:pPr>
-            <a:r>
-              <a:rPr sz="1200" b="0">
-                <a:solidFill>
-                  <a:srgbClr val="FFFFFF"/>
-                </a:solidFill>
-                <a:latin typeface="Arial"/>
-                <a:ea typeface="Arial"/>
-                <a:cs typeface="Arial"/>
-              </a:rPr>
-              <a:t>התעריף זהה בשני המסלולים.</a:t>
-            </a:r>
-          </a:p>
-        </p:txBody>
-      </p:sp>
-      <p:sp>
-        <p:nvSpPr>
-          <p:cNvPr id="13" name="Rectangle 12"/>
+          <p:cNvPr id="12" name="Rectangle 11"/>
           <p:cNvSpPr/>
           <p:nvPr/>
         </p:nvSpPr>
@@ -12623,7 +12582,7 @@
       </p:sp>
       <p:sp>
         <p:nvSpPr>
-          <p:cNvPr id="14" name="Rectangle 13"/>
+          <p:cNvPr id="13" name="Rectangle 12"/>
           <p:cNvSpPr/>
           <p:nvPr/>
         </p:nvSpPr>
@@ -12655,7 +12614,7 @@
       </p:sp>
       <p:sp>
         <p:nvSpPr>
-          <p:cNvPr id="15" name="Rectangle 14"/>
+          <p:cNvPr id="14" name="Rectangle 13"/>
           <p:cNvSpPr/>
           <p:nvPr/>
         </p:nvSpPr>
@@ -12687,7 +12646,7 @@
       </p:sp>
       <p:sp>
         <p:nvSpPr>
-          <p:cNvPr id="16" name="Rectangle 15"/>
+          <p:cNvPr id="15" name="Rectangle 14"/>
           <p:cNvSpPr/>
           <p:nvPr/>
         </p:nvSpPr>
@@ -12719,7 +12678,7 @@
       </p:sp>
       <p:sp>
         <p:nvSpPr>
-          <p:cNvPr id="17" name="Rectangle 16"/>
+          <p:cNvPr id="16" name="Rectangle 15"/>
           <p:cNvSpPr/>
           <p:nvPr/>
         </p:nvSpPr>
@@ -12751,7 +12710,7 @@
       </p:sp>
       <p:sp>
         <p:nvSpPr>
-          <p:cNvPr id="18" name="Rectangle 17"/>
+          <p:cNvPr id="17" name="Rectangle 16"/>
           <p:cNvSpPr/>
           <p:nvPr/>
         </p:nvSpPr>
@@ -12783,7 +12742,7 @@
       </p:sp>
       <p:sp>
         <p:nvSpPr>
-          <p:cNvPr id="19" name="TextBox 18"/>
+          <p:cNvPr id="18" name="TextBox 17"/>
           <p:cNvSpPr txBox="1"/>
           <p:nvPr/>
         </p:nvSpPr>
@@ -12824,7 +12783,7 @@
       </p:sp>
       <p:sp>
         <p:nvSpPr>
-          <p:cNvPr id="20" name="TextBox 19"/>
+          <p:cNvPr id="19" name="TextBox 18"/>
           <p:cNvSpPr txBox="1"/>
           <p:nvPr/>
         </p:nvSpPr>
@@ -12865,7 +12824,7 @@
       </p:sp>
       <p:sp>
         <p:nvSpPr>
-          <p:cNvPr id="21" name="TextBox 20"/>
+          <p:cNvPr id="20" name="TextBox 19"/>
           <p:cNvSpPr txBox="1"/>
           <p:nvPr/>
         </p:nvSpPr>
@@ -12928,7 +12887,7 @@
       </p:sp>
       <p:sp>
         <p:nvSpPr>
-          <p:cNvPr id="22" name="TextBox 21"/>
+          <p:cNvPr id="21" name="TextBox 20"/>
           <p:cNvSpPr txBox="1"/>
           <p:nvPr/>
         </p:nvSpPr>
@@ -12969,7 +12928,7 @@
       </p:sp>
       <p:sp>
         <p:nvSpPr>
-          <p:cNvPr id="23" name="Rectangle 22"/>
+          <p:cNvPr id="22" name="Rectangle 21"/>
           <p:cNvSpPr/>
           <p:nvPr/>
         </p:nvSpPr>
@@ -13001,7 +12960,7 @@
       </p:sp>
       <p:sp>
         <p:nvSpPr>
-          <p:cNvPr id="24" name="Rectangle 23"/>
+          <p:cNvPr id="23" name="Rectangle 22"/>
           <p:cNvSpPr/>
           <p:nvPr/>
         </p:nvSpPr>
@@ -13033,7 +12992,7 @@
       </p:sp>
       <p:sp>
         <p:nvSpPr>
-          <p:cNvPr id="25" name="Rectangle 24"/>
+          <p:cNvPr id="24" name="Rectangle 23"/>
           <p:cNvSpPr/>
           <p:nvPr/>
         </p:nvSpPr>
@@ -13065,7 +13024,7 @@
       </p:sp>
       <p:sp>
         <p:nvSpPr>
-          <p:cNvPr id="26" name="Rectangle 25"/>
+          <p:cNvPr id="25" name="Rectangle 24"/>
           <p:cNvSpPr/>
           <p:nvPr/>
         </p:nvSpPr>
@@ -13097,7 +13056,7 @@
       </p:sp>
       <p:sp>
         <p:nvSpPr>
-          <p:cNvPr id="27" name="Rectangle 26"/>
+          <p:cNvPr id="26" name="Rectangle 25"/>
           <p:cNvSpPr/>
           <p:nvPr/>
         </p:nvSpPr>
@@ -13129,7 +13088,7 @@
       </p:sp>
       <p:sp>
         <p:nvSpPr>
-          <p:cNvPr id="28" name="Rectangle 27"/>
+          <p:cNvPr id="27" name="Rectangle 26"/>
           <p:cNvSpPr/>
           <p:nvPr/>
         </p:nvSpPr>
@@ -13161,7 +13120,7 @@
       </p:sp>
       <p:sp>
         <p:nvSpPr>
-          <p:cNvPr id="29" name="TextBox 28"/>
+          <p:cNvPr id="28" name="TextBox 27"/>
           <p:cNvSpPr txBox="1"/>
           <p:nvPr/>
         </p:nvSpPr>
@@ -13202,7 +13161,7 @@
       </p:sp>
       <p:sp>
         <p:nvSpPr>
-          <p:cNvPr id="30" name="TextBox 29"/>
+          <p:cNvPr id="29" name="TextBox 28"/>
           <p:cNvSpPr txBox="1"/>
           <p:nvPr/>
         </p:nvSpPr>
@@ -13243,7 +13202,7 @@
       </p:sp>
       <p:sp>
         <p:nvSpPr>
-          <p:cNvPr id="31" name="TextBox 30"/>
+          <p:cNvPr id="30" name="TextBox 29"/>
           <p:cNvSpPr txBox="1"/>
           <p:nvPr/>
         </p:nvSpPr>
@@ -13284,7 +13243,7 @@
       </p:sp>
       <p:sp>
         <p:nvSpPr>
-          <p:cNvPr id="32" name="TextBox 31"/>
+          <p:cNvPr id="31" name="TextBox 30"/>
           <p:cNvSpPr txBox="1"/>
           <p:nvPr/>
         </p:nvSpPr>
@@ -13325,7 +13284,7 @@
       </p:sp>
       <p:sp>
         <p:nvSpPr>
-          <p:cNvPr id="33" name="Rectangle 32"/>
+          <p:cNvPr id="32" name="Rectangle 31"/>
           <p:cNvSpPr/>
           <p:nvPr/>
         </p:nvSpPr>
@@ -13357,7 +13316,7 @@
       </p:sp>
       <p:sp>
         <p:nvSpPr>
-          <p:cNvPr id="34" name="Rectangle 33"/>
+          <p:cNvPr id="33" name="Rectangle 32"/>
           <p:cNvSpPr/>
           <p:nvPr/>
         </p:nvSpPr>
@@ -13389,7 +13348,7 @@
       </p:sp>
       <p:sp>
         <p:nvSpPr>
-          <p:cNvPr id="35" name="TextBox 34"/>
+          <p:cNvPr id="34" name="TextBox 33"/>
           <p:cNvSpPr txBox="1"/>
           <p:nvPr/>
         </p:nvSpPr>
@@ -13452,7 +13411,7 @@
       </p:sp>
       <p:sp>
         <p:nvSpPr>
-          <p:cNvPr id="36" name="Rectangle 35"/>
+          <p:cNvPr id="35" name="Rectangle 34"/>
           <p:cNvSpPr/>
           <p:nvPr/>
         </p:nvSpPr>
@@ -13484,7 +13443,7 @@
       </p:sp>
       <p:sp>
         <p:nvSpPr>
-          <p:cNvPr id="37" name="TextBox 36"/>
+          <p:cNvPr id="36" name="TextBox 35"/>
           <p:cNvSpPr txBox="1"/>
           <p:nvPr/>
         </p:nvSpPr>
@@ -13525,7 +13484,7 @@
       </p:sp>
       <p:sp>
         <p:nvSpPr>
-          <p:cNvPr id="38" name="TextBox 37"/>
+          <p:cNvPr id="37" name="TextBox 36"/>
           <p:cNvSpPr txBox="1"/>
           <p:nvPr/>
         </p:nvSpPr>

--- a/dist/deck.pptx
+++ b/dist/deck.pptx
@@ -6934,7 +6934,7 @@
         <p:spPr>
           <a:xfrm>
             <a:off x="9357420" y="2387600"/>
-            <a:ext cx="2072580" cy="2652117"/>
+            <a:ext cx="2072580" cy="2658467"/>
           </a:xfrm>
           <a:prstGeom prst="rect">
             <a:avLst/>
@@ -7354,7 +7354,7 @@
         </p:nvSpPr>
         <p:spPr>
           <a:xfrm>
-            <a:off x="9439970" y="4607917"/>
+            <a:off x="9439970" y="4614267"/>
             <a:ext cx="1907480" cy="342900"/>
           </a:xfrm>
           <a:prstGeom prst="rect">
@@ -7396,7 +7396,7 @@
         <p:spPr>
           <a:xfrm>
             <a:off x="7208540" y="2387600"/>
-            <a:ext cx="2072680" cy="2652117"/>
+            <a:ext cx="2072680" cy="2658467"/>
           </a:xfrm>
           <a:prstGeom prst="rect">
             <a:avLst/>
@@ -7680,7 +7680,7 @@
                 <a:ea typeface="Arial"/>
                 <a:cs typeface="Arial"/>
               </a:rPr>
-              <a:t>מיפוי שוק וגודלו</a:t>
+              <a:t>מיפוי וגודל השוק</a:t>
             </a:r>
           </a:p>
         </p:txBody>
@@ -7694,6 +7694,47 @@
         <p:spPr>
           <a:xfrm>
             <a:off x="7291090" y="3682405"/>
+            <a:ext cx="1907580" cy="396081"/>
+          </a:xfrm>
+          <a:prstGeom prst="rect">
+            <a:avLst/>
+          </a:prstGeom>
+          <a:noFill/>
+        </p:spPr>
+        <p:txBody>
+          <a:bodyPr wrap="square" lIns="0" rIns="0" tIns="0" bIns="0" anchor="t">
+            <a:noAutofit/>
+          </a:bodyPr>
+          <a:lstStyle/>
+          <a:p>
+            <a:pPr algn="r" rtl="1">
+              <a:lnSpc>
+                <a:spcPts val="1560"/>
+              </a:lnSpc>
+            </a:pPr>
+            <a:r>
+              <a:rPr sz="1200" b="0">
+                <a:solidFill>
+                  <a:srgbClr val="4C4A44"/>
+                </a:solidFill>
+                <a:latin typeface="Arial"/>
+                <a:ea typeface="Arial"/>
+                <a:cs typeface="Arial"/>
+              </a:rPr>
+              <a:t>סגמנטציה ראשונית של הלקוחות</a:t>
+            </a:r>
+          </a:p>
+        </p:txBody>
+      </p:sp>
+      <p:sp>
+        <p:nvSpPr>
+          <p:cNvPr id="27" name="TextBox 26"/>
+          <p:cNvSpPr txBox="1"/>
+          <p:nvPr/>
+        </p:nvSpPr>
+        <p:spPr>
+          <a:xfrm>
+            <a:off x="7291090" y="4116586"/>
             <a:ext cx="1907580" cy="198041"/>
           </a:xfrm>
           <a:prstGeom prst="rect">
@@ -7721,6 +7762,47 @@
                 <a:ea typeface="Arial"/>
                 <a:cs typeface="Arial"/>
               </a:rPr>
+              <a:t>ראיונות לקוחות ומומחים</a:t>
+            </a:r>
+          </a:p>
+        </p:txBody>
+      </p:sp>
+      <p:sp>
+        <p:nvSpPr>
+          <p:cNvPr id="28" name="TextBox 27"/>
+          <p:cNvSpPr txBox="1"/>
+          <p:nvPr/>
+        </p:nvSpPr>
+        <p:spPr>
+          <a:xfrm>
+            <a:off x="7291090" y="4352727"/>
+            <a:ext cx="1907580" cy="198041"/>
+          </a:xfrm>
+          <a:prstGeom prst="rect">
+            <a:avLst/>
+          </a:prstGeom>
+          <a:noFill/>
+        </p:spPr>
+        <p:txBody>
+          <a:bodyPr wrap="square" lIns="0" rIns="0" tIns="0" bIns="0" anchor="t">
+            <a:noAutofit/>
+          </a:bodyPr>
+          <a:lstStyle/>
+          <a:p>
+            <a:pPr algn="r" rtl="1">
+              <a:lnSpc>
+                <a:spcPts val="1560"/>
+              </a:lnSpc>
+            </a:pPr>
+            <a:r>
+              <a:rPr sz="1200" b="0">
+                <a:solidFill>
+                  <a:srgbClr val="4C4A44"/>
+                </a:solidFill>
+                <a:latin typeface="Arial"/>
+                <a:ea typeface="Arial"/>
+                <a:cs typeface="Arial"/>
+              </a:rPr>
               <a:t>ניתוח חלופות ומתחרים</a:t>
             </a:r>
           </a:p>
@@ -7728,13 +7810,13 @@
       </p:sp>
       <p:sp>
         <p:nvSpPr>
-          <p:cNvPr id="27" name="TextBox 26"/>
-          <p:cNvSpPr txBox="1"/>
-          <p:nvPr/>
-        </p:nvSpPr>
-        <p:spPr>
-          <a:xfrm>
-            <a:off x="7291090" y="3918545"/>
+          <p:cNvPr id="29" name="TextBox 28"/>
+          <p:cNvSpPr txBox="1"/>
+          <p:nvPr/>
+        </p:nvSpPr>
+        <p:spPr>
+          <a:xfrm>
+            <a:off x="7291090" y="4588867"/>
             <a:ext cx="1907580" cy="198041"/>
           </a:xfrm>
           <a:prstGeom prst="rect">
@@ -7762,47 +7844,6 @@
                 <a:ea typeface="Arial"/>
                 <a:cs typeface="Arial"/>
               </a:rPr>
-              <a:t>ראיונות לקוחות ומומחים</a:t>
-            </a:r>
-          </a:p>
-        </p:txBody>
-      </p:sp>
-      <p:sp>
-        <p:nvSpPr>
-          <p:cNvPr id="28" name="TextBox 27"/>
-          <p:cNvSpPr txBox="1"/>
-          <p:nvPr/>
-        </p:nvSpPr>
-        <p:spPr>
-          <a:xfrm>
-            <a:off x="7291090" y="4154686"/>
-            <a:ext cx="1907580" cy="198041"/>
-          </a:xfrm>
-          <a:prstGeom prst="rect">
-            <a:avLst/>
-          </a:prstGeom>
-          <a:noFill/>
-        </p:spPr>
-        <p:txBody>
-          <a:bodyPr wrap="square" lIns="0" rIns="0" tIns="0" bIns="0" anchor="t">
-            <a:noAutofit/>
-          </a:bodyPr>
-          <a:lstStyle/>
-          <a:p>
-            <a:pPr algn="r" rtl="1">
-              <a:lnSpc>
-                <a:spcPts val="1560"/>
-              </a:lnSpc>
-            </a:pPr>
-            <a:r>
-              <a:rPr sz="1200" b="0">
-                <a:solidFill>
-                  <a:srgbClr val="4C4A44"/>
-                </a:solidFill>
-                <a:latin typeface="Arial"/>
-                <a:ea typeface="Arial"/>
-                <a:cs typeface="Arial"/>
-              </a:rPr>
               <a:t>חסמי מעבר ונכונות לשלם</a:t>
             </a:r>
           </a:p>
@@ -7810,14 +7851,14 @@
       </p:sp>
       <p:sp>
         <p:nvSpPr>
-          <p:cNvPr id="29" name="Rectangle 28"/>
+          <p:cNvPr id="30" name="Rectangle 29"/>
           <p:cNvSpPr/>
           <p:nvPr/>
         </p:nvSpPr>
         <p:spPr>
           <a:xfrm>
             <a:off x="5059759" y="2387600"/>
-            <a:ext cx="2072580" cy="2652117"/>
+            <a:ext cx="2072580" cy="2658467"/>
           </a:xfrm>
           <a:prstGeom prst="rect">
             <a:avLst/>
@@ -7844,7 +7885,7 @@
       </p:sp>
       <p:sp>
         <p:nvSpPr>
-          <p:cNvPr id="30" name="Rectangle 29"/>
+          <p:cNvPr id="31" name="Rectangle 30"/>
           <p:cNvSpPr/>
           <p:nvPr/>
         </p:nvSpPr>
@@ -7876,7 +7917,7 @@
       </p:sp>
       <p:sp>
         <p:nvSpPr>
-          <p:cNvPr id="31" name="Rectangle 30"/>
+          <p:cNvPr id="32" name="Rectangle 31"/>
           <p:cNvSpPr/>
           <p:nvPr/>
         </p:nvSpPr>
@@ -7908,7 +7949,7 @@
       </p:sp>
       <p:sp>
         <p:nvSpPr>
-          <p:cNvPr id="32" name="Rounded Rectangle 31"/>
+          <p:cNvPr id="33" name="Rounded Rectangle 32"/>
           <p:cNvSpPr/>
           <p:nvPr/>
         </p:nvSpPr>
@@ -7944,7 +7985,7 @@
       </p:sp>
       <p:sp>
         <p:nvSpPr>
-          <p:cNvPr id="33" name="TextBox 32"/>
+          <p:cNvPr id="34" name="TextBox 33"/>
           <p:cNvSpPr txBox="1"/>
           <p:nvPr/>
         </p:nvSpPr>
@@ -7985,7 +8026,7 @@
       </p:sp>
       <p:sp>
         <p:nvSpPr>
-          <p:cNvPr id="34" name="TextBox 33"/>
+          <p:cNvPr id="35" name="TextBox 34"/>
           <p:cNvSpPr txBox="1"/>
           <p:nvPr/>
         </p:nvSpPr>
@@ -8026,7 +8067,7 @@
       </p:sp>
       <p:sp>
         <p:nvSpPr>
-          <p:cNvPr id="35" name="TextBox 34"/>
+          <p:cNvPr id="36" name="TextBox 35"/>
           <p:cNvSpPr txBox="1"/>
           <p:nvPr/>
         </p:nvSpPr>
@@ -8067,7 +8108,7 @@
       </p:sp>
       <p:sp>
         <p:nvSpPr>
-          <p:cNvPr id="36" name="TextBox 35"/>
+          <p:cNvPr id="37" name="TextBox 36"/>
           <p:cNvSpPr txBox="1"/>
           <p:nvPr/>
         </p:nvSpPr>
@@ -8101,36 +8142,14 @@
                 <a:ea typeface="Arial"/>
                 <a:cs typeface="Arial"/>
               </a:rPr>
-              <a:t>לקוח יעד מוגדר (</a:t>
-            </a:r>
-            <a:r>
-              <a:rPr sz="1200" b="0">
-                <a:solidFill>
-                  <a:srgbClr val="4C4A44"/>
-                </a:solidFill>
-                <a:latin typeface="Arial"/>
-                <a:ea typeface="Arial"/>
-                <a:cs typeface="Arial"/>
-              </a:rPr>
-              <a:t>⁦ICP⁩</a:t>
-            </a:r>
-            <a:r>
-              <a:rPr sz="1200" b="0">
-                <a:solidFill>
-                  <a:srgbClr val="4C4A44"/>
-                </a:solidFill>
-                <a:latin typeface="Arial"/>
-                <a:ea typeface="Arial"/>
-                <a:cs typeface="Arial"/>
-              </a:rPr>
-              <a:t>)</a:t>
-            </a:r>
-          </a:p>
-        </p:txBody>
-      </p:sp>
-      <p:sp>
-        <p:nvSpPr>
-          <p:cNvPr id="37" name="TextBox 36"/>
+              <a:t>בחירת סגמנט היעד</a:t>
+            </a:r>
+          </a:p>
+        </p:txBody>
+      </p:sp>
+      <p:sp>
+        <p:nvSpPr>
+          <p:cNvPr id="38" name="TextBox 37"/>
           <p:cNvSpPr txBox="1"/>
           <p:nvPr/>
         </p:nvSpPr>
@@ -8164,14 +8183,14 @@
                 <a:ea typeface="Arial"/>
                 <a:cs typeface="Arial"/>
               </a:rPr>
-              <a:t>הבעיה המרכזית</a:t>
-            </a:r>
-          </a:p>
-        </p:txBody>
-      </p:sp>
-      <p:sp>
-        <p:nvSpPr>
-          <p:cNvPr id="38" name="TextBox 37"/>
+              <a:t>הגדרת הלקוח הראשוני</a:t>
+            </a:r>
+          </a:p>
+        </p:txBody>
+      </p:sp>
+      <p:sp>
+        <p:nvSpPr>
+          <p:cNvPr id="39" name="TextBox 38"/>
           <p:cNvSpPr txBox="1"/>
           <p:nvPr/>
         </p:nvSpPr>
@@ -8205,14 +8224,14 @@
                 <a:ea typeface="Arial"/>
                 <a:cs typeface="Arial"/>
               </a:rPr>
-              <a:t>הצעת הערך והבידול</a:t>
-            </a:r>
-          </a:p>
-        </p:txBody>
-      </p:sp>
-      <p:sp>
-        <p:nvSpPr>
-          <p:cNvPr id="39" name="TextBox 38"/>
+              <a:t>הבעיה המרכזית</a:t>
+            </a:r>
+          </a:p>
+        </p:txBody>
+      </p:sp>
+      <p:sp>
+        <p:nvSpPr>
+          <p:cNvPr id="40" name="TextBox 39"/>
           <p:cNvSpPr txBox="1"/>
           <p:nvPr/>
         </p:nvSpPr>
@@ -8246,6 +8265,47 @@
                 <a:ea typeface="Arial"/>
                 <a:cs typeface="Arial"/>
               </a:rPr>
+              <a:t>הצעת הערך והבידול</a:t>
+            </a:r>
+          </a:p>
+        </p:txBody>
+      </p:sp>
+      <p:sp>
+        <p:nvSpPr>
+          <p:cNvPr id="41" name="TextBox 40"/>
+          <p:cNvSpPr txBox="1"/>
+          <p:nvPr/>
+        </p:nvSpPr>
+        <p:spPr>
+          <a:xfrm>
+            <a:off x="5142309" y="4390827"/>
+            <a:ext cx="1907480" cy="198041"/>
+          </a:xfrm>
+          <a:prstGeom prst="rect">
+            <a:avLst/>
+          </a:prstGeom>
+          <a:noFill/>
+        </p:spPr>
+        <p:txBody>
+          <a:bodyPr wrap="square" lIns="0" rIns="0" tIns="0" bIns="0" anchor="t">
+            <a:noAutofit/>
+          </a:bodyPr>
+          <a:lstStyle/>
+          <a:p>
+            <a:pPr algn="r" rtl="1">
+              <a:lnSpc>
+                <a:spcPts val="1560"/>
+              </a:lnSpc>
+            </a:pPr>
+            <a:r>
+              <a:rPr sz="1200" b="0">
+                <a:solidFill>
+                  <a:srgbClr val="4C4A44"/>
+                </a:solidFill>
+                <a:latin typeface="Arial"/>
+                <a:ea typeface="Arial"/>
+                <a:cs typeface="Arial"/>
+              </a:rPr>
               <a:t>גבולות המוצר הראשון</a:t>
             </a:r>
           </a:p>
@@ -8253,14 +8313,14 @@
       </p:sp>
       <p:sp>
         <p:nvSpPr>
-          <p:cNvPr id="40" name="Rectangle 39"/>
+          <p:cNvPr id="42" name="Rectangle 41"/>
           <p:cNvSpPr/>
           <p:nvPr/>
         </p:nvSpPr>
         <p:spPr>
           <a:xfrm>
             <a:off x="2910880" y="2387600"/>
-            <a:ext cx="2072680" cy="2652117"/>
+            <a:ext cx="2072680" cy="2658467"/>
           </a:xfrm>
           <a:prstGeom prst="rect">
             <a:avLst/>
@@ -8287,14 +8347,14 @@
       </p:sp>
       <p:sp>
         <p:nvSpPr>
-          <p:cNvPr id="41" name="Rectangle 40"/>
+          <p:cNvPr id="43" name="Rectangle 42"/>
           <p:cNvSpPr/>
           <p:nvPr/>
         </p:nvSpPr>
         <p:spPr>
           <a:xfrm>
             <a:off x="2917230" y="2393950"/>
-            <a:ext cx="2059980" cy="969764"/>
+            <a:ext cx="2059980" cy="1338064"/>
           </a:xfrm>
           <a:prstGeom prst="rect">
             <a:avLst/>
@@ -8319,13 +8379,13 @@
       </p:sp>
       <p:sp>
         <p:nvSpPr>
-          <p:cNvPr id="42" name="Rectangle 41"/>
+          <p:cNvPr id="44" name="Rectangle 43"/>
           <p:cNvSpPr/>
           <p:nvPr/>
         </p:nvSpPr>
         <p:spPr>
           <a:xfrm>
-            <a:off x="2917230" y="3357364"/>
+            <a:off x="2917230" y="3725664"/>
             <a:ext cx="2059980" cy="6350"/>
           </a:xfrm>
           <a:prstGeom prst="rect">
@@ -8351,7 +8411,7 @@
       </p:sp>
       <p:sp>
         <p:nvSpPr>
-          <p:cNvPr id="43" name="Rounded Rectangle 42"/>
+          <p:cNvPr id="45" name="Rounded Rectangle 44"/>
           <p:cNvSpPr/>
           <p:nvPr/>
         </p:nvSpPr>
@@ -8387,7 +8447,7 @@
       </p:sp>
       <p:sp>
         <p:nvSpPr>
-          <p:cNvPr id="44" name="TextBox 43"/>
+          <p:cNvPr id="46" name="TextBox 45"/>
           <p:cNvSpPr txBox="1"/>
           <p:nvPr/>
         </p:nvSpPr>
@@ -8428,7 +8488,7 @@
       </p:sp>
       <p:sp>
         <p:nvSpPr>
-          <p:cNvPr id="45" name="TextBox 44"/>
+          <p:cNvPr id="47" name="TextBox 46"/>
           <p:cNvSpPr txBox="1"/>
           <p:nvPr/>
         </p:nvSpPr>
@@ -8469,7 +8529,7 @@
       </p:sp>
       <p:sp>
         <p:nvSpPr>
-          <p:cNvPr id="46" name="TextBox 45"/>
+          <p:cNvPr id="48" name="TextBox 47"/>
           <p:cNvSpPr txBox="1"/>
           <p:nvPr/>
         </p:nvSpPr>
@@ -8510,13 +8570,54 @@
       </p:sp>
       <p:sp>
         <p:nvSpPr>
-          <p:cNvPr id="47" name="TextBox 46"/>
-          <p:cNvSpPr txBox="1"/>
-          <p:nvPr/>
-        </p:nvSpPr>
-        <p:spPr>
-          <a:xfrm>
-            <a:off x="2993430" y="3446264"/>
+          <p:cNvPr id="49" name="TextBox 48"/>
+          <p:cNvSpPr txBox="1"/>
+          <p:nvPr/>
+        </p:nvSpPr>
+        <p:spPr>
+          <a:xfrm>
+            <a:off x="2993430" y="3331964"/>
+            <a:ext cx="1907580" cy="330200"/>
+          </a:xfrm>
+          <a:prstGeom prst="rect">
+            <a:avLst/>
+          </a:prstGeom>
+          <a:noFill/>
+        </p:spPr>
+        <p:txBody>
+          <a:bodyPr wrap="square" lIns="0" rIns="0" tIns="0" bIns="0" anchor="t">
+            <a:noAutofit/>
+          </a:bodyPr>
+          <a:lstStyle/>
+          <a:p>
+            <a:pPr algn="ctr" rtl="1">
+              <a:lnSpc>
+                <a:spcPts val="1300"/>
+              </a:lnSpc>
+            </a:pPr>
+            <a:r>
+              <a:rPr sz="1000" b="0">
+                <a:solidFill>
+                  <a:srgbClr val="7B7970"/>
+                </a:solidFill>
+                <a:latin typeface="Arial"/>
+                <a:ea typeface="Arial"/>
+                <a:cs typeface="Arial"/>
+              </a:rPr>
+              <a:t>תרגום ממצאי השוק והגדרת המוצר למודל כלכלי</a:t>
+            </a:r>
+          </a:p>
+        </p:txBody>
+      </p:sp>
+      <p:sp>
+        <p:nvSpPr>
+          <p:cNvPr id="50" name="TextBox 49"/>
+          <p:cNvSpPr txBox="1"/>
+          <p:nvPr/>
+        </p:nvSpPr>
+        <p:spPr>
+          <a:xfrm>
+            <a:off x="2993430" y="3814564"/>
             <a:ext cx="1907580" cy="198041"/>
           </a:xfrm>
           <a:prstGeom prst="rect">
@@ -8544,20 +8645,61 @@
                 <a:ea typeface="Arial"/>
                 <a:cs typeface="Arial"/>
               </a:rPr>
-              <a:t>שוק נגיש ותמחור אפשרי</a:t>
-            </a:r>
-          </a:p>
-        </p:txBody>
-      </p:sp>
-      <p:sp>
-        <p:nvSpPr>
-          <p:cNvPr id="48" name="TextBox 47"/>
-          <p:cNvSpPr txBox="1"/>
-          <p:nvPr/>
-        </p:nvSpPr>
-        <p:spPr>
-          <a:xfrm>
-            <a:off x="2993430" y="3682405"/>
+              <a:t>גודל קהל היעד הרלוונטי</a:t>
+            </a:r>
+          </a:p>
+        </p:txBody>
+      </p:sp>
+      <p:sp>
+        <p:nvSpPr>
+          <p:cNvPr id="51" name="TextBox 50"/>
+          <p:cNvSpPr txBox="1"/>
+          <p:nvPr/>
+        </p:nvSpPr>
+        <p:spPr>
+          <a:xfrm>
+            <a:off x="2928636" y="4050705"/>
+            <a:ext cx="1972374" cy="198041"/>
+          </a:xfrm>
+          <a:prstGeom prst="rect">
+            <a:avLst/>
+          </a:prstGeom>
+          <a:noFill/>
+        </p:spPr>
+        <p:txBody>
+          <a:bodyPr wrap="square" lIns="0" rIns="0" tIns="0" bIns="0" anchor="t">
+            <a:noAutofit/>
+          </a:bodyPr>
+          <a:lstStyle/>
+          <a:p>
+            <a:pPr algn="r" rtl="1">
+              <a:lnSpc>
+                <a:spcPts val="1560"/>
+              </a:lnSpc>
+            </a:pPr>
+            <a:r>
+              <a:rPr sz="1200" b="0">
+                <a:solidFill>
+                  <a:srgbClr val="4C4A44"/>
+                </a:solidFill>
+                <a:latin typeface="Arial"/>
+                <a:ea typeface="Arial"/>
+                <a:cs typeface="Arial"/>
+              </a:rPr>
+              <a:t>תמחור והכנסה פוטנציאלית</a:t>
+            </a:r>
+          </a:p>
+        </p:txBody>
+      </p:sp>
+      <p:sp>
+        <p:nvSpPr>
+          <p:cNvPr id="52" name="TextBox 51"/>
+          <p:cNvSpPr txBox="1"/>
+          <p:nvPr/>
+        </p:nvSpPr>
+        <p:spPr>
+          <a:xfrm>
+            <a:off x="2993430" y="4286845"/>
             <a:ext cx="1907580" cy="198041"/>
           </a:xfrm>
           <a:prstGeom prst="rect">
@@ -8585,20 +8727,20 @@
                 <a:ea typeface="Arial"/>
                 <a:cs typeface="Arial"/>
               </a:rPr>
-              <a:t>הנחות אימוץ</a:t>
-            </a:r>
-          </a:p>
-        </p:txBody>
-      </p:sp>
-      <p:sp>
-        <p:nvSpPr>
-          <p:cNvPr id="49" name="TextBox 48"/>
-          <p:cNvSpPr txBox="1"/>
-          <p:nvPr/>
-        </p:nvSpPr>
-        <p:spPr>
-          <a:xfrm>
-            <a:off x="2993430" y="3918545"/>
+              <a:t>הנחות חדירה ואימוץ</a:t>
+            </a:r>
+          </a:p>
+        </p:txBody>
+      </p:sp>
+      <p:sp>
+        <p:nvSpPr>
+          <p:cNvPr id="53" name="TextBox 52"/>
+          <p:cNvSpPr txBox="1"/>
+          <p:nvPr/>
+        </p:nvSpPr>
+        <p:spPr>
+          <a:xfrm>
+            <a:off x="2993430" y="4522986"/>
             <a:ext cx="1907580" cy="198041"/>
           </a:xfrm>
           <a:prstGeom prst="rect">
@@ -8633,13 +8775,13 @@
       </p:sp>
       <p:sp>
         <p:nvSpPr>
-          <p:cNvPr id="50" name="TextBox 49"/>
-          <p:cNvSpPr txBox="1"/>
-          <p:nvPr/>
-        </p:nvSpPr>
-        <p:spPr>
-          <a:xfrm>
-            <a:off x="2993430" y="4154686"/>
+          <p:cNvPr id="54" name="TextBox 53"/>
+          <p:cNvSpPr txBox="1"/>
+          <p:nvPr/>
+        </p:nvSpPr>
+        <p:spPr>
+          <a:xfrm>
+            <a:off x="2993430" y="4759127"/>
             <a:ext cx="1907580" cy="198041"/>
           </a:xfrm>
           <a:prstGeom prst="rect">
@@ -8674,14 +8816,14 @@
       </p:sp>
       <p:sp>
         <p:nvSpPr>
-          <p:cNvPr id="51" name="Rectangle 50"/>
+          <p:cNvPr id="55" name="Rectangle 54"/>
           <p:cNvSpPr/>
           <p:nvPr/>
         </p:nvSpPr>
         <p:spPr>
           <a:xfrm>
             <a:off x="762099" y="2387600"/>
-            <a:ext cx="2072580" cy="2652117"/>
+            <a:ext cx="2072580" cy="2658467"/>
           </a:xfrm>
           <a:prstGeom prst="rect">
             <a:avLst/>
@@ -8708,7 +8850,7 @@
       </p:sp>
       <p:sp>
         <p:nvSpPr>
-          <p:cNvPr id="52" name="Rectangle 51"/>
+          <p:cNvPr id="56" name="Rectangle 55"/>
           <p:cNvSpPr/>
           <p:nvPr/>
         </p:nvSpPr>
@@ -8740,7 +8882,7 @@
       </p:sp>
       <p:sp>
         <p:nvSpPr>
-          <p:cNvPr id="53" name="Rectangle 52"/>
+          <p:cNvPr id="57" name="Rectangle 56"/>
           <p:cNvSpPr/>
           <p:nvPr/>
         </p:nvSpPr>
@@ -8772,7 +8914,7 @@
       </p:sp>
       <p:sp>
         <p:nvSpPr>
-          <p:cNvPr id="54" name="Rounded Rectangle 53"/>
+          <p:cNvPr id="58" name="Rounded Rectangle 57"/>
           <p:cNvSpPr/>
           <p:nvPr/>
         </p:nvSpPr>
@@ -8808,7 +8950,7 @@
       </p:sp>
       <p:sp>
         <p:nvSpPr>
-          <p:cNvPr id="55" name="TextBox 54"/>
+          <p:cNvPr id="59" name="TextBox 58"/>
           <p:cNvSpPr txBox="1"/>
           <p:nvPr/>
         </p:nvSpPr>
@@ -8849,7 +8991,7 @@
       </p:sp>
       <p:sp>
         <p:nvSpPr>
-          <p:cNvPr id="56" name="TextBox 55"/>
+          <p:cNvPr id="60" name="TextBox 59"/>
           <p:cNvSpPr txBox="1"/>
           <p:nvPr/>
         </p:nvSpPr>
@@ -8890,7 +9032,7 @@
       </p:sp>
       <p:sp>
         <p:nvSpPr>
-          <p:cNvPr id="57" name="TextBox 56"/>
+          <p:cNvPr id="61" name="TextBox 60"/>
           <p:cNvSpPr txBox="1"/>
           <p:nvPr/>
         </p:nvSpPr>
@@ -8931,7 +9073,7 @@
       </p:sp>
       <p:sp>
         <p:nvSpPr>
-          <p:cNvPr id="58" name="TextBox 57"/>
+          <p:cNvPr id="62" name="TextBox 61"/>
           <p:cNvSpPr txBox="1"/>
           <p:nvPr/>
         </p:nvSpPr>
@@ -8972,7 +9114,7 @@
       </p:sp>
       <p:sp>
         <p:nvSpPr>
-          <p:cNvPr id="59" name="TextBox 58"/>
+          <p:cNvPr id="63" name="TextBox 62"/>
           <p:cNvSpPr txBox="1"/>
           <p:nvPr/>
         </p:nvSpPr>
@@ -9013,7 +9155,7 @@
       </p:sp>
       <p:sp>
         <p:nvSpPr>
-          <p:cNvPr id="60" name="TextBox 59"/>
+          <p:cNvPr id="64" name="TextBox 63"/>
           <p:cNvSpPr txBox="1"/>
           <p:nvPr/>
         </p:nvSpPr>
@@ -9054,7 +9196,7 @@
       </p:sp>
       <p:sp>
         <p:nvSpPr>
-          <p:cNvPr id="61" name="TextBox 60"/>
+          <p:cNvPr id="65" name="TextBox 64"/>
           <p:cNvSpPr txBox="1"/>
           <p:nvPr/>
         </p:nvSpPr>
@@ -9095,7 +9237,7 @@
       </p:sp>
       <p:sp>
         <p:nvSpPr>
-          <p:cNvPr id="62" name="Rectangle 61"/>
+          <p:cNvPr id="66" name="Rectangle 65"/>
           <p:cNvSpPr/>
           <p:nvPr/>
         </p:nvSpPr>
@@ -9127,7 +9269,7 @@
       </p:sp>
       <p:sp>
         <p:nvSpPr>
-          <p:cNvPr id="63" name="Rectangle 62"/>
+          <p:cNvPr id="67" name="Rectangle 66"/>
           <p:cNvSpPr/>
           <p:nvPr/>
         </p:nvSpPr>
@@ -9159,7 +9301,7 @@
       </p:sp>
       <p:sp>
         <p:nvSpPr>
-          <p:cNvPr id="64" name="TextBox 63"/>
+          <p:cNvPr id="68" name="TextBox 67"/>
           <p:cNvSpPr txBox="1"/>
           <p:nvPr/>
         </p:nvSpPr>
@@ -9200,7 +9342,7 @@
       </p:sp>
       <p:sp>
         <p:nvSpPr>
-          <p:cNvPr id="65" name="TextBox 64"/>
+          <p:cNvPr id="69" name="TextBox 68"/>
           <p:cNvSpPr txBox="1"/>
           <p:nvPr/>
         </p:nvSpPr>
@@ -9241,7 +9383,7 @@
       </p:sp>
       <p:sp>
         <p:nvSpPr>
-          <p:cNvPr id="66" name="Rectangle 65"/>
+          <p:cNvPr id="70" name="Rectangle 69"/>
           <p:cNvSpPr/>
           <p:nvPr/>
         </p:nvSpPr>
@@ -9273,7 +9415,7 @@
       </p:sp>
       <p:sp>
         <p:nvSpPr>
-          <p:cNvPr id="67" name="Rectangle 66"/>
+          <p:cNvPr id="71" name="Rectangle 70"/>
           <p:cNvSpPr/>
           <p:nvPr/>
         </p:nvSpPr>
@@ -9305,7 +9447,7 @@
       </p:sp>
       <p:sp>
         <p:nvSpPr>
-          <p:cNvPr id="68" name="Rectangle 67"/>
+          <p:cNvPr id="72" name="Rectangle 71"/>
           <p:cNvSpPr/>
           <p:nvPr/>
         </p:nvSpPr>
@@ -9337,7 +9479,7 @@
       </p:sp>
       <p:sp>
         <p:nvSpPr>
-          <p:cNvPr id="69" name="TextBox 68"/>
+          <p:cNvPr id="73" name="TextBox 72"/>
           <p:cNvSpPr txBox="1"/>
           <p:nvPr/>
         </p:nvSpPr>
@@ -9378,7 +9520,7 @@
       </p:sp>
       <p:sp>
         <p:nvSpPr>
-          <p:cNvPr id="70" name="Rectangle 69"/>
+          <p:cNvPr id="74" name="Rectangle 73"/>
           <p:cNvSpPr/>
           <p:nvPr/>
         </p:nvSpPr>
@@ -9410,7 +9552,7 @@
       </p:sp>
       <p:sp>
         <p:nvSpPr>
-          <p:cNvPr id="71" name="TextBox 70"/>
+          <p:cNvPr id="75" name="TextBox 74"/>
           <p:cNvSpPr txBox="1"/>
           <p:nvPr/>
         </p:nvSpPr>
@@ -9451,7 +9593,7 @@
       </p:sp>
       <p:sp>
         <p:nvSpPr>
-          <p:cNvPr id="72" name="Rectangle 71"/>
+          <p:cNvPr id="76" name="Rectangle 75"/>
           <p:cNvSpPr/>
           <p:nvPr/>
         </p:nvSpPr>
@@ -9483,7 +9625,7 @@
       </p:sp>
       <p:sp>
         <p:nvSpPr>
-          <p:cNvPr id="73" name="TextBox 72"/>
+          <p:cNvPr id="77" name="TextBox 76"/>
           <p:cNvSpPr txBox="1"/>
           <p:nvPr/>
         </p:nvSpPr>
@@ -9524,7 +9666,7 @@
       </p:sp>
       <p:sp>
         <p:nvSpPr>
-          <p:cNvPr id="74" name="TextBox 73"/>
+          <p:cNvPr id="78" name="TextBox 77"/>
           <p:cNvSpPr txBox="1"/>
           <p:nvPr/>
         </p:nvSpPr>
@@ -9565,7 +9707,7 @@
       </p:sp>
       <p:sp>
         <p:nvSpPr>
-          <p:cNvPr id="75" name="Rectangle 74"/>
+          <p:cNvPr id="79" name="Rectangle 78"/>
           <p:cNvSpPr/>
           <p:nvPr/>
         </p:nvSpPr>
@@ -9597,7 +9739,7 @@
       </p:sp>
       <p:sp>
         <p:nvSpPr>
-          <p:cNvPr id="76" name="TextBox 75"/>
+          <p:cNvPr id="80" name="TextBox 79"/>
           <p:cNvSpPr txBox="1"/>
           <p:nvPr/>
         </p:nvSpPr>
@@ -9638,7 +9780,7 @@
       </p:sp>
       <p:sp>
         <p:nvSpPr>
-          <p:cNvPr id="77" name="TextBox 76"/>
+          <p:cNvPr id="81" name="TextBox 80"/>
           <p:cNvSpPr txBox="1"/>
           <p:nvPr/>
         </p:nvSpPr>

--- a/dist/deck.pptx
+++ b/dist/deck.pptx
@@ -9967,8 +9967,8 @@
         </p:nvSpPr>
         <p:spPr>
           <a:xfrm>
-            <a:off x="2076371" y="1828800"/>
-            <a:ext cx="9353629" cy="274241"/>
+            <a:off x="2794000" y="1828800"/>
+            <a:ext cx="8636000" cy="274241"/>
           </a:xfrm>
           <a:prstGeom prst="rect">
             <a:avLst/>
@@ -9995,7 +9995,7 @@
                 <a:ea typeface="Arial"/>
                 <a:cs typeface="Arial"/>
               </a:rPr>
-              <a:t>אותה מסגרת אסטרטגית. ההבדל הוא מי מבצע את המחקר — ומכאן עומק הראיות ומידת עצמאותן.</a:t>
+              <a:t>אותה מסגרת אסטרטגית - מודל עבודה שונה.</a:t>
             </a:r>
           </a:p>
         </p:txBody>
@@ -10175,7 +10175,7 @@
                 <a:ea typeface="Arial"/>
                 <a:cs typeface="Arial"/>
               </a:rPr>
-              <a:t>אלון מוביל את המתודולוגיה, המסגרות, הניתוח והמודל הכלכלי; בן ואופק משלימים משימות בין המפגשים.</a:t>
+              <a:t>אני מוביל את התהליך המקצועי והניתוח; בן ואופק משלימים חלק מאיסוף המידע והבדיקות בין המפגשים.</a:t>
             </a:r>
           </a:p>
         </p:txBody>
@@ -10216,7 +10216,7 @@
                 <a:ea typeface="Arial"/>
                 <a:cs typeface="Arial"/>
               </a:rPr>
-              <a:t>אלון מוביל</a:t>
+              <a:t>אני מוביל</a:t>
             </a:r>
           </a:p>
         </p:txBody>
@@ -10257,7 +10257,7 @@
                 <a:ea typeface="Arial"/>
                 <a:cs typeface="Arial"/>
               </a:rPr>
-              <a:t>מתודולוגיה ומסגרות עבודה · אתגור הנחות · ניתוח ממצאים · מודל כלכלי · סינתזה ומסקנות</a:t>
+              <a:t>הגדרת מה צריך לבדוק ואיך · אתגור ההנחות · ניתוח הממצאים · בניית המודל הכלכלי · סינתזה ומסקנות</a:t>
             </a:r>
           </a:p>
         </p:txBody>
@@ -10444,7 +10444,7 @@
                 <a:ea typeface="Arial"/>
                 <a:cs typeface="Arial"/>
               </a:rPr>
-              <a:t>ראיונות עומק קריטיים יבוצעו בהובלתי לפי הצורך.</a:t>
+              <a:t>אם יעלה צורך, גם ראיונות עומק בשוק יבוצעו בהשתתפותי.</a:t>
             </a:r>
           </a:p>
         </p:txBody>
@@ -10672,7 +10672,7 @@
                 <a:ea typeface="Arial"/>
                 <a:cs typeface="Arial"/>
               </a:rPr>
-              <a:t>רמת התיקוף החיצוני והעצמאי נמוכה יותר.</a:t>
+              <a:t>היקף התיקוף החיצוני מצומצם יותר.</a:t>
             </a:r>
           </a:p>
         </p:txBody>
@@ -10792,7 +10792,7 @@
         </p:nvSpPr>
         <p:spPr>
           <a:xfrm>
-            <a:off x="946150" y="3427611"/>
+            <a:off x="946150" y="3221930"/>
             <a:ext cx="4876800" cy="6350"/>
           </a:xfrm>
           <a:prstGeom prst="rect">
@@ -10825,7 +10825,7 @@
         <p:spPr>
           <a:xfrm>
             <a:off x="946150" y="2927350"/>
-            <a:ext cx="4876800" cy="411361"/>
+            <a:ext cx="4876800" cy="205680"/>
           </a:xfrm>
           <a:prstGeom prst="rect">
             <a:avLst/>
@@ -10852,7 +10852,7 @@
                 <a:ea typeface="Arial"/>
                 <a:cs typeface="Arial"/>
               </a:rPr>
-              <a:t>אלון מוביל את המחקר והניתוח מקצה לקצה — עיצוב המחקר, עבודת השטח והראיונות מול לקוחות ומומחים.</a:t>
+              <a:t>אני מוביל את המחקר והניתוח מקצה לקצה.</a:t>
             </a:r>
           </a:p>
         </p:txBody>
@@ -10865,7 +10865,7 @@
         </p:nvSpPr>
         <p:spPr>
           <a:xfrm>
-            <a:off x="3473450" y="3535561"/>
+            <a:off x="3473450" y="3329880"/>
             <a:ext cx="2349500" cy="184150"/>
           </a:xfrm>
           <a:prstGeom prst="rect">
@@ -10893,7 +10893,7 @@
                 <a:ea typeface="Arial"/>
                 <a:cs typeface="Arial"/>
               </a:rPr>
-              <a:t>אלון מוביל</a:t>
+              <a:t>אני מוביל</a:t>
             </a:r>
           </a:p>
         </p:txBody>
@@ -10906,7 +10906,7 @@
         </p:nvSpPr>
         <p:spPr>
           <a:xfrm>
-            <a:off x="3473450" y="3770511"/>
+            <a:off x="3473450" y="3564830"/>
             <a:ext cx="2349500" cy="617041"/>
           </a:xfrm>
           <a:prstGeom prst="rect">
@@ -10934,7 +10934,7 @@
                 <a:ea typeface="Arial"/>
                 <a:cs typeface="Arial"/>
               </a:rPr>
-              <a:t>מיפוי שוק · ניתוח חלופות ומתחרים · עיצוב המחקר · ראיונות עומק · סינתזת ראיות · מודל כלכלי · מפת דרכים</a:t>
+              <a:t>מחקר השוק · ניתוח חלופות ומתחרים · ראיונות עומק · ניתוח וסינתזה · בניית המודל הכלכלי · מפת דרכים</a:t>
             </a:r>
           </a:p>
         </p:txBody>
@@ -10947,7 +10947,7 @@
         </p:nvSpPr>
         <p:spPr>
           <a:xfrm>
-            <a:off x="946150" y="3535561"/>
+            <a:off x="946150" y="3329880"/>
             <a:ext cx="2349500" cy="184150"/>
           </a:xfrm>
           <a:prstGeom prst="rect">
@@ -10988,8 +10988,8 @@
         </p:nvSpPr>
         <p:spPr>
           <a:xfrm>
-            <a:off x="946150" y="3770511"/>
-            <a:ext cx="2349500" cy="411361"/>
+            <a:off x="946150" y="3564830"/>
+            <a:ext cx="2349500" cy="617041"/>
           </a:xfrm>
           <a:prstGeom prst="rect">
             <a:avLst/>
@@ -11016,7 +11016,7 @@
                 <a:ea typeface="Arial"/>
                 <a:cs typeface="Arial"/>
               </a:rPr>
-              <a:t>גישה ונתונים פנימיים · הקשר ענפי · הפניות · שותפות בהחלטות</a:t>
+              <a:t>מידע ונתונים פנימיים · היכרות עם הענף · הפניות לאנשים רלוונטיים · שותפות בהחלטות</a:t>
             </a:r>
           </a:p>
         </p:txBody>
@@ -11130,7 +11130,7 @@
                 <a:ea typeface="Arial"/>
                 <a:cs typeface="Arial"/>
               </a:rPr>
-              <a:t>רמת עומק, עצמאות ואיכות ראיות גבוהה יותר.</a:t>
+              <a:t>רמת עומק ואיכות ראיות גבוהה יותר.</a:t>
             </a:r>
           </a:p>
         </p:txBody>
@@ -11397,8 +11397,8 @@
         </p:nvSpPr>
         <p:spPr>
           <a:xfrm>
-            <a:off x="10941050" y="508000"/>
-            <a:ext cx="488950" cy="298450"/>
+            <a:off x="10280650" y="508000"/>
+            <a:ext cx="1149350" cy="298450"/>
           </a:xfrm>
           <a:prstGeom prst="rect">
             <a:avLst/>
@@ -11429,8 +11429,8 @@
         </p:nvSpPr>
         <p:spPr>
           <a:xfrm>
-            <a:off x="10955338" y="552450"/>
-            <a:ext cx="373063" cy="203200"/>
+            <a:off x="10135902" y="552450"/>
+            <a:ext cx="1192498" cy="203200"/>
           </a:xfrm>
           <a:prstGeom prst="rect">
             <a:avLst/>
@@ -11457,7 +11457,7 @@
                 <a:ea typeface="Arial"/>
                 <a:cs typeface="Arial"/>
               </a:rPr>
-              <a:t>לדיון</a:t>
+              <a:t>התאמת התהליך</a:t>
             </a:r>
           </a:p>
         </p:txBody>
@@ -11498,7 +11498,7 @@
                 <a:ea typeface="Arial"/>
                 <a:cs typeface="Arial"/>
               </a:rPr>
-              <a:t>מה חשוב שנבין היום?</a:t>
+              <a:t>כדי לדייק את התהליך, חשוב להבין עוד כמה דברים</a:t>
             </a:r>
           </a:p>
         </p:txBody>
@@ -11539,7 +11539,7 @@
                 <a:ea typeface="Arial"/>
                 <a:cs typeface="Arial"/>
               </a:rPr>
-              <a:t>חמש שאלות שיקבעו את מטרת העבודה ואת רמת הבדיקה המתאימה.</a:t>
+              <a:t>השאלות הבאות יעזרו להתאים את עומק הבדיקה, חלוקת העבודה והיקף התהליך.</a:t>
             </a:r>
           </a:p>
         </p:txBody>
@@ -11627,7 +11627,7 @@
         </p:nvSpPr>
         <p:spPr>
           <a:xfrm>
-            <a:off x="762000" y="2608858"/>
+            <a:off x="762000" y="2507258"/>
             <a:ext cx="10134600" cy="222845"/>
           </a:xfrm>
           <a:prstGeom prst="rect">
@@ -11655,14 +11655,55 @@
                 <a:ea typeface="Arial"/>
                 <a:cs typeface="Arial"/>
               </a:rPr>
-              <a:t>מה בדיוק במצב הקיים גרם לכם לומר: "צריך לבנות לזה פתרון אחר"?</a:t>
-            </a:r>
-          </a:p>
-        </p:txBody>
-      </p:sp>
-      <p:sp>
-        <p:nvSpPr>
-          <p:cNvPr id="9" name="Rounded Rectangle 8"/>
+              <a:t>מה כבר עשיתם עד היום ומה כבר קיים?</a:t>
+            </a:r>
+          </a:p>
+        </p:txBody>
+      </p:sp>
+      <p:sp>
+        <p:nvSpPr>
+          <p:cNvPr id="9" name="TextBox 8"/>
+          <p:cNvSpPr txBox="1"/>
+          <p:nvPr/>
+        </p:nvSpPr>
+        <p:spPr>
+          <a:xfrm>
+            <a:off x="762000" y="2761853"/>
+            <a:ext cx="10134600" cy="171450"/>
+          </a:xfrm>
+          <a:prstGeom prst="rect">
+            <a:avLst/>
+          </a:prstGeom>
+          <a:noFill/>
+        </p:spPr>
+        <p:txBody>
+          <a:bodyPr wrap="square" lIns="0" rIns="0" tIns="0" bIns="0" anchor="t">
+            <a:noAutofit/>
+          </a:bodyPr>
+          <a:lstStyle/>
+          <a:p>
+            <a:pPr algn="r" rtl="1">
+              <a:lnSpc>
+                <a:spcPts val="1350"/>
+              </a:lnSpc>
+            </a:pPr>
+            <a:r>
+              <a:rPr sz="1000" b="0">
+                <a:solidFill>
+                  <a:srgbClr val="7B7970"/>
+                </a:solidFill>
+                <a:latin typeface="Arial"/>
+                <a:ea typeface="Arial"/>
+                <a:cs typeface="Arial"/>
+              </a:rPr>
+              <a:t>אפיון, נתונים, שיחות עם לקוחות, הצעות פיתוח או בדיקות אחרות.</a:t>
+            </a:r>
+          </a:p>
+        </p:txBody>
+      </p:sp>
+      <p:sp>
+        <p:nvSpPr>
+          <p:cNvPr id="10" name="Rounded Rectangle 9"/>
           <p:cNvSpPr/>
           <p:nvPr/>
         </p:nvSpPr>
@@ -11696,7 +11737,7 @@
       </p:sp>
       <p:sp>
         <p:nvSpPr>
-          <p:cNvPr id="10" name="TextBox 9"/>
+          <p:cNvPr id="11" name="TextBox 10"/>
           <p:cNvSpPr txBox="1"/>
           <p:nvPr/>
         </p:nvSpPr>
@@ -11737,7 +11778,7 @@
       </p:sp>
       <p:sp>
         <p:nvSpPr>
-          <p:cNvPr id="11" name="TextBox 10"/>
+          <p:cNvPr id="12" name="TextBox 11"/>
           <p:cNvSpPr txBox="1"/>
           <p:nvPr/>
         </p:nvSpPr>
@@ -11771,14 +11812,14 @@
                 <a:ea typeface="Arial"/>
                 <a:cs typeface="Arial"/>
               </a:rPr>
-              <a:t>למי אתם חושבים שהמוצר הראשון מיועד — ומה גורם לכם לחשוב שזה הלקוח הנכון?</a:t>
-            </a:r>
-          </a:p>
-        </p:txBody>
-      </p:sp>
-      <p:sp>
-        <p:nvSpPr>
-          <p:cNvPr id="12" name="Rounded Rectangle 11"/>
+              <a:t>מה אתם רוצים שהמיזם הזה יהיה בעוד 3–5 שנים?</a:t>
+            </a:r>
+          </a:p>
+        </p:txBody>
+      </p:sp>
+      <p:sp>
+        <p:nvSpPr>
+          <p:cNvPr id="13" name="Rounded Rectangle 12"/>
           <p:cNvSpPr/>
           <p:nvPr/>
         </p:nvSpPr>
@@ -11812,7 +11853,7 @@
       </p:sp>
       <p:sp>
         <p:nvSpPr>
-          <p:cNvPr id="13" name="TextBox 12"/>
+          <p:cNvPr id="14" name="TextBox 13"/>
           <p:cNvSpPr txBox="1"/>
           <p:nvPr/>
         </p:nvSpPr>
@@ -11853,13 +11894,13 @@
       </p:sp>
       <p:sp>
         <p:nvSpPr>
-          <p:cNvPr id="14" name="TextBox 13"/>
-          <p:cNvSpPr txBox="1"/>
-          <p:nvPr/>
-        </p:nvSpPr>
-        <p:spPr>
-          <a:xfrm>
-            <a:off x="762000" y="3939778"/>
+          <p:cNvPr id="15" name="TextBox 14"/>
+          <p:cNvSpPr txBox="1"/>
+          <p:nvPr/>
+        </p:nvSpPr>
+        <p:spPr>
+          <a:xfrm>
+            <a:off x="762000" y="3838178"/>
             <a:ext cx="10134600" cy="222845"/>
           </a:xfrm>
           <a:prstGeom prst="rect">
@@ -11887,14 +11928,77 @@
                 <a:ea typeface="Arial"/>
                 <a:cs typeface="Arial"/>
               </a:rPr>
-              <a:t>מה כבר עשיתם עד היום: אפיון, שיחות עם לקוחות, נתונים, הצעות פיתוח או בדיקות אחרות?</a:t>
-            </a:r>
-          </a:p>
-        </p:txBody>
-      </p:sp>
-      <p:sp>
-        <p:nvSpPr>
-          <p:cNvPr id="15" name="Rounded Rectangle 14"/>
+              <a:t>איזו החלטה אתם רוצים להיות מסוגלים לקבל בסוף התהליך?</a:t>
+            </a:r>
+          </a:p>
+        </p:txBody>
+      </p:sp>
+      <p:sp>
+        <p:nvSpPr>
+          <p:cNvPr id="16" name="TextBox 15"/>
+          <p:cNvSpPr txBox="1"/>
+          <p:nvPr/>
+        </p:nvSpPr>
+        <p:spPr>
+          <a:xfrm>
+            <a:off x="762000" y="4092773"/>
+            <a:ext cx="10134600" cy="171450"/>
+          </a:xfrm>
+          <a:prstGeom prst="rect">
+            <a:avLst/>
+          </a:prstGeom>
+          <a:noFill/>
+        </p:spPr>
+        <p:txBody>
+          <a:bodyPr wrap="square" lIns="0" rIns="0" tIns="0" bIns="0" anchor="t">
+            <a:noAutofit/>
+          </a:bodyPr>
+          <a:lstStyle/>
+          <a:p>
+            <a:pPr algn="r" rtl="1">
+              <a:lnSpc>
+                <a:spcPts val="1350"/>
+              </a:lnSpc>
+            </a:pPr>
+            <a:r>
+              <a:rPr sz="1000" b="0">
+                <a:solidFill>
+                  <a:srgbClr val="7B7970"/>
+                </a:solidFill>
+                <a:latin typeface="Arial"/>
+                <a:ea typeface="Arial"/>
+                <a:cs typeface="Arial"/>
+              </a:rPr>
+              <a:t>למשל: האם לפתח? מה לפתח? כמה להשקיע? האם השוק מספיק גדול? האם להתמקד ב-</a:t>
+            </a:r>
+            <a:r>
+              <a:rPr sz="1000" b="0">
+                <a:solidFill>
+                  <a:srgbClr val="7B7970"/>
+                </a:solidFill>
+                <a:latin typeface="Arial"/>
+                <a:ea typeface="Arial"/>
+                <a:cs typeface="Arial"/>
+              </a:rPr>
+              <a:t>⁦DJs⁩</a:t>
+            </a:r>
+            <a:r>
+              <a:rPr sz="1000" b="0">
+                <a:solidFill>
+                  <a:srgbClr val="7B7970"/>
+                </a:solidFill>
+                <a:latin typeface="Arial"/>
+                <a:ea typeface="Arial"/>
+                <a:cs typeface="Arial"/>
+              </a:rPr>
+              <a:t> או לבחון התרחבות?</a:t>
+            </a:r>
+          </a:p>
+        </p:txBody>
+      </p:sp>
+      <p:sp>
+        <p:nvSpPr>
+          <p:cNvPr id="17" name="Rounded Rectangle 16"/>
           <p:cNvSpPr/>
           <p:nvPr/>
         </p:nvSpPr>
@@ -11928,7 +12032,7 @@
       </p:sp>
       <p:sp>
         <p:nvSpPr>
-          <p:cNvPr id="16" name="TextBox 15"/>
+          <p:cNvPr id="18" name="TextBox 17"/>
           <p:cNvSpPr txBox="1"/>
           <p:nvPr/>
         </p:nvSpPr>
@@ -11969,13 +12073,13 @@
       </p:sp>
       <p:sp>
         <p:nvSpPr>
-          <p:cNvPr id="17" name="TextBox 16"/>
-          <p:cNvSpPr txBox="1"/>
-          <p:nvPr/>
-        </p:nvSpPr>
-        <p:spPr>
-          <a:xfrm>
-            <a:off x="762000" y="4605238"/>
+          <p:cNvPr id="19" name="TextBox 18"/>
+          <p:cNvSpPr txBox="1"/>
+          <p:nvPr/>
+        </p:nvSpPr>
+        <p:spPr>
+          <a:xfrm>
+            <a:off x="762000" y="4503638"/>
             <a:ext cx="10134600" cy="222845"/>
           </a:xfrm>
           <a:prstGeom prst="rect">
@@ -12003,14 +12107,55 @@
                 <a:ea typeface="Arial"/>
                 <a:cs typeface="Arial"/>
               </a:rPr>
-              <a:t>מה אתם רוצים שהמיזם הזה יהיה בעוד 3–5 שנים — ומה מבחינתכם ייחשב הצלחה?</a:t>
-            </a:r>
-          </a:p>
-        </p:txBody>
-      </p:sp>
-      <p:sp>
-        <p:nvSpPr>
-          <p:cNvPr id="18" name="Rectangle 17"/>
+              <a:t>כמה מהעבודה אתם רוצים ויכולים לקחת על עצמכם?</a:t>
+            </a:r>
+          </a:p>
+        </p:txBody>
+      </p:sp>
+      <p:sp>
+        <p:nvSpPr>
+          <p:cNvPr id="20" name="TextBox 19"/>
+          <p:cNvSpPr txBox="1"/>
+          <p:nvPr/>
+        </p:nvSpPr>
+        <p:spPr>
+          <a:xfrm>
+            <a:off x="762000" y="4758234"/>
+            <a:ext cx="10134600" cy="171450"/>
+          </a:xfrm>
+          <a:prstGeom prst="rect">
+            <a:avLst/>
+          </a:prstGeom>
+          <a:noFill/>
+        </p:spPr>
+        <p:txBody>
+          <a:bodyPr wrap="square" lIns="0" rIns="0" tIns="0" bIns="0" anchor="t">
+            <a:noAutofit/>
+          </a:bodyPr>
+          <a:lstStyle/>
+          <a:p>
+            <a:pPr algn="r" rtl="1">
+              <a:lnSpc>
+                <a:spcPts val="1350"/>
+              </a:lnSpc>
+            </a:pPr>
+            <a:r>
+              <a:rPr sz="1000" b="0">
+                <a:solidFill>
+                  <a:srgbClr val="7B7970"/>
+                </a:solidFill>
+                <a:latin typeface="Arial"/>
+                <a:ea typeface="Arial"/>
+                <a:cs typeface="Arial"/>
+              </a:rPr>
+              <a:t>איסוף מידע, השלמת נתונים, בדיקות בשוק ומשימות בין המפגשים.</a:t>
+            </a:r>
+          </a:p>
+        </p:txBody>
+      </p:sp>
+      <p:sp>
+        <p:nvSpPr>
+          <p:cNvPr id="21" name="Rectangle 20"/>
           <p:cNvSpPr/>
           <p:nvPr/>
         </p:nvSpPr>
@@ -12042,7 +12187,7 @@
       </p:sp>
       <p:sp>
         <p:nvSpPr>
-          <p:cNvPr id="19" name="Rounded Rectangle 18"/>
+          <p:cNvPr id="22" name="Rounded Rectangle 21"/>
           <p:cNvSpPr/>
           <p:nvPr/>
         </p:nvSpPr>
@@ -12078,7 +12223,7 @@
       </p:sp>
       <p:sp>
         <p:nvSpPr>
-          <p:cNvPr id="20" name="TextBox 19"/>
+          <p:cNvPr id="23" name="TextBox 22"/>
           <p:cNvSpPr txBox="1"/>
           <p:nvPr/>
         </p:nvSpPr>
@@ -12119,13 +12264,13 @@
       </p:sp>
       <p:sp>
         <p:nvSpPr>
-          <p:cNvPr id="21" name="TextBox 20"/>
-          <p:cNvSpPr txBox="1"/>
-          <p:nvPr/>
-        </p:nvSpPr>
-        <p:spPr>
-          <a:xfrm>
-            <a:off x="762000" y="5270798"/>
+          <p:cNvPr id="24" name="TextBox 23"/>
+          <p:cNvSpPr txBox="1"/>
+          <p:nvPr/>
+        </p:nvSpPr>
+        <p:spPr>
+          <a:xfrm>
+            <a:off x="762000" y="5169198"/>
             <a:ext cx="10134600" cy="222845"/>
           </a:xfrm>
           <a:prstGeom prst="rect">
@@ -12153,14 +12298,55 @@
                 <a:ea typeface="Arial"/>
                 <a:cs typeface="Arial"/>
               </a:rPr>
-              <a:t>מה הייתם רוצים לדעת בסוף תהליך הבדיקה כדי להרגיש בנוח לקבל החלטה על ההשקעה הבאה?</a:t>
-            </a:r>
-          </a:p>
-        </p:txBody>
-      </p:sp>
-      <p:sp>
-        <p:nvSpPr>
-          <p:cNvPr id="22" name="Rectangle 21"/>
+              <a:t>האם יש החלטה או לוח זמנים שכבר עומדים על הפרק?</a:t>
+            </a:r>
+          </a:p>
+        </p:txBody>
+      </p:sp>
+      <p:sp>
+        <p:nvSpPr>
+          <p:cNvPr id="25" name="TextBox 24"/>
+          <p:cNvSpPr txBox="1"/>
+          <p:nvPr/>
+        </p:nvSpPr>
+        <p:spPr>
+          <a:xfrm>
+            <a:off x="762000" y="5423793"/>
+            <a:ext cx="10134600" cy="171450"/>
+          </a:xfrm>
+          <a:prstGeom prst="rect">
+            <a:avLst/>
+          </a:prstGeom>
+          <a:noFill/>
+        </p:spPr>
+        <p:txBody>
+          <a:bodyPr wrap="square" lIns="0" rIns="0" tIns="0" bIns="0" anchor="t">
+            <a:noAutofit/>
+          </a:bodyPr>
+          <a:lstStyle/>
+          <a:p>
+            <a:pPr algn="r" rtl="1">
+              <a:lnSpc>
+                <a:spcPts val="1350"/>
+              </a:lnSpc>
+            </a:pPr>
+            <a:r>
+              <a:rPr sz="1000" b="0">
+                <a:solidFill>
+                  <a:srgbClr val="7B7970"/>
+                </a:solidFill>
+                <a:latin typeface="Arial"/>
+                <a:ea typeface="Arial"/>
+                <a:cs typeface="Arial"/>
+              </a:rPr>
+              <a:t>למשל הצעת פיתוח שמחכה להחלטה, תקציב, שותף או תאריך יעד.</a:t>
+            </a:r>
+          </a:p>
+        </p:txBody>
+      </p:sp>
+      <p:sp>
+        <p:nvSpPr>
+          <p:cNvPr id="26" name="Rectangle 25"/>
           <p:cNvSpPr/>
           <p:nvPr/>
         </p:nvSpPr>
@@ -12192,14 +12378,14 @@
       </p:sp>
       <p:sp>
         <p:nvSpPr>
-          <p:cNvPr id="23" name="TextBox 22"/>
-          <p:cNvSpPr txBox="1"/>
-          <p:nvPr/>
-        </p:nvSpPr>
-        <p:spPr>
-          <a:xfrm>
-            <a:off x="10174605" y="6121400"/>
-            <a:ext cx="1255395" cy="184150"/>
+          <p:cNvPr id="27" name="TextBox 26"/>
+          <p:cNvSpPr txBox="1"/>
+          <p:nvPr/>
+        </p:nvSpPr>
+        <p:spPr>
+          <a:xfrm>
+            <a:off x="8928338" y="6121400"/>
+            <a:ext cx="2501662" cy="184150"/>
           </a:xfrm>
           <a:prstGeom prst="rect">
             <a:avLst/>
@@ -12226,14 +12412,14 @@
                 <a:ea typeface="Arial"/>
                 <a:cs typeface="Arial"/>
               </a:rPr>
-              <a:t>פגישת היכרות ומיפוי</a:t>
-            </a:r>
-          </a:p>
-        </p:txBody>
-      </p:sp>
-      <p:sp>
-        <p:nvSpPr>
-          <p:cNvPr id="24" name="TextBox 23"/>
+              <a:t>מתאים את עומק הבדיקה וחלוקת העבודה</a:t>
+            </a:r>
+          </a:p>
+        </p:txBody>
+      </p:sp>
+      <p:sp>
+        <p:nvSpPr>
+          <p:cNvPr id="28" name="TextBox 27"/>
           <p:cNvSpPr txBox="1"/>
           <p:nvPr/>
         </p:nvSpPr>
@@ -13378,7 +13564,7 @@
                 <a:ea typeface="Arial"/>
                 <a:cs typeface="Arial"/>
               </a:rPr>
-              <a:t>יוגדר לאחר פגישת המיפוי</a:t>
+              <a:t>יוגדר לאחר פגישת ההיכרות</a:t>
             </a:r>
           </a:p>
         </p:txBody>
@@ -13591,8 +13777,8 @@
         </p:nvSpPr>
         <p:spPr>
           <a:xfrm>
-            <a:off x="8631079" y="6121400"/>
-            <a:ext cx="2798921" cy="184150"/>
+            <a:off x="8513397" y="6121400"/>
+            <a:ext cx="2916603" cy="184150"/>
           </a:xfrm>
           <a:prstGeom prst="rect">
             <a:avLst/>
@@ -13619,7 +13805,7 @@
                 <a:ea typeface="Arial"/>
                 <a:cs typeface="Arial"/>
               </a:rPr>
-              <a:t>תעריף שעתי · היקף ייקבע לאחר פגישת המיפוי</a:t>
+              <a:t>תעריף שעתי · היקף ייקבע לאחר פגישת ההיכרות</a:t>
             </a:r>
           </a:p>
         </p:txBody>
@@ -13841,7 +14027,7 @@
                 <a:ea typeface="Arial"/>
                 <a:cs typeface="Arial"/>
               </a:rPr>
-              <a:t>ארבעה צעדים מכאן לשלב הבדיקה.</a:t>
+              <a:t>ארבעה צעדים קצרים מכאן והלאה.</a:t>
             </a:r>
           </a:p>
         </p:txBody>
@@ -14447,7 +14633,7 @@
                 <a:ea typeface="Arial"/>
                 <a:cs typeface="Arial"/>
               </a:rPr>
-              <a:t>יוצאים לשלב הבדיקה</a:t>
+              <a:t>יוצאים לדרך</a:t>
             </a:r>
           </a:p>
         </p:txBody>

--- a/dist/deck.pptx
+++ b/dist/deck.pptx
@@ -3330,8 +3330,8 @@
         </p:nvSpPr>
         <p:spPr>
           <a:xfrm>
-            <a:off x="3048000" y="2717800"/>
-            <a:ext cx="8382000" cy="531416"/>
+            <a:off x="1524000" y="2717800"/>
+            <a:ext cx="9906000" cy="1146770"/>
           </a:xfrm>
           <a:prstGeom prst="rect">
             <a:avLst/>
@@ -3363,7 +3363,7 @@
         <p:spPr>
           <a:xfrm>
             <a:off x="11398250" y="2717800"/>
-            <a:ext cx="31750" cy="531416"/>
+            <a:ext cx="31750" cy="1146770"/>
           </a:xfrm>
           <a:prstGeom prst="rect">
             <a:avLst/>
@@ -3394,27 +3394,68 @@
         </p:nvSpPr>
         <p:spPr>
           <a:xfrm>
-            <a:off x="2167604" y="2857500"/>
-            <a:ext cx="9040146" cy="239316"/>
-          </a:xfrm>
-          <a:prstGeom prst="rect">
-            <a:avLst/>
-          </a:prstGeom>
-          <a:noFill/>
-        </p:spPr>
-        <p:txBody>
-          <a:bodyPr wrap="square" lIns="0" rIns="0" tIns="0" bIns="0" anchor="t">
-            <a:noAutofit/>
-          </a:bodyPr>
-          <a:lstStyle/>
-          <a:p>
-            <a:pPr algn="r" rtl="1">
-              <a:lnSpc>
-                <a:spcPts val="1885"/>
-              </a:lnSpc>
-            </a:pPr>
-            <a:r>
-              <a:rPr sz="1300" b="0">
+            <a:off x="1727200" y="2882900"/>
+            <a:ext cx="9467850" cy="184150"/>
+          </a:xfrm>
+          <a:prstGeom prst="rect">
+            <a:avLst/>
+          </a:prstGeom>
+          <a:noFill/>
+        </p:spPr>
+        <p:txBody>
+          <a:bodyPr wrap="square" lIns="0" rIns="0" tIns="0" bIns="0" anchor="t">
+            <a:noAutofit/>
+          </a:bodyPr>
+          <a:lstStyle/>
+          <a:p>
+            <a:pPr algn="r" rtl="1">
+              <a:lnSpc>
+                <a:spcPts val="1200"/>
+              </a:lnSpc>
+            </a:pPr>
+            <a:r>
+              <a:rPr sz="1000" b="1">
+                <a:solidFill>
+                  <a:srgbClr val="B44A22"/>
+                </a:solidFill>
+                <a:latin typeface="Arial"/>
+                <a:ea typeface="Arial"/>
+                <a:cs typeface="Arial"/>
+              </a:rPr>
+              <a:t>מטרת התהליך:</a:t>
+            </a:r>
+          </a:p>
+        </p:txBody>
+      </p:sp>
+      <p:sp>
+        <p:nvSpPr>
+          <p:cNvPr id="11" name="TextBox 10"/>
+          <p:cNvSpPr txBox="1"/>
+          <p:nvPr/>
+        </p:nvSpPr>
+        <p:spPr>
+          <a:xfrm>
+            <a:off x="1727200" y="3117850"/>
+            <a:ext cx="9467850" cy="568920"/>
+          </a:xfrm>
+          <a:prstGeom prst="rect">
+            <a:avLst/>
+          </a:prstGeom>
+          <a:noFill/>
+        </p:spPr>
+        <p:txBody>
+          <a:bodyPr wrap="square" lIns="0" rIns="0" tIns="0" bIns="0" anchor="t">
+            <a:noAutofit/>
+          </a:bodyPr>
+          <a:lstStyle/>
+          <a:p>
+            <a:pPr algn="r" rtl="1">
+              <a:lnSpc>
+                <a:spcPts val="2240"/>
+              </a:lnSpc>
+            </a:pPr>
+            <a:r>
+              <a:rPr sz="1600" b="0">
                 <a:solidFill>
                   <a:srgbClr val="12212F"/>
                 </a:solidFill>
@@ -3422,20 +3463,20 @@
                 <a:ea typeface="Arial"/>
                 <a:cs typeface="Arial"/>
               </a:rPr>
-              <a:t>המטרה היא לא להחליט היום אם לפתח — אלא להבין מה צריך להיות נכון כדי שהמיזם יהיה כדאי, ואיך נכון לבדוק זאת.</a:t>
-            </a:r>
-          </a:p>
-        </p:txBody>
-      </p:sp>
-      <p:sp>
-        <p:nvSpPr>
-          <p:cNvPr id="11" name="Rectangle 10"/>
+              <a:t>להבין האם קיימת הזדמנות עסקית אמיתית, עבור מי ובאילו תנאים היא יכולה להיות כדאית, ורק אז להחליט אם ואיך להתקדם לפיתוח.</a:t>
+            </a:r>
+          </a:p>
+        </p:txBody>
+      </p:sp>
+      <p:sp>
+        <p:nvSpPr>
+          <p:cNvPr id="12" name="Rectangle 11"/>
           <p:cNvSpPr/>
           <p:nvPr/>
         </p:nvSpPr>
         <p:spPr>
           <a:xfrm>
-            <a:off x="8111133" y="4445000"/>
+            <a:off x="8111133" y="4559300"/>
             <a:ext cx="3318867" cy="38100"/>
           </a:xfrm>
           <a:prstGeom prst="rect">
@@ -3461,54 +3502,13 @@
       </p:sp>
       <p:sp>
         <p:nvSpPr>
-          <p:cNvPr id="12" name="TextBox 11"/>
-          <p:cNvSpPr txBox="1"/>
-          <p:nvPr/>
-        </p:nvSpPr>
-        <p:spPr>
-          <a:xfrm>
-            <a:off x="8111133" y="4610100"/>
-            <a:ext cx="3318867" cy="184150"/>
-          </a:xfrm>
-          <a:prstGeom prst="rect">
-            <a:avLst/>
-          </a:prstGeom>
-          <a:noFill/>
-        </p:spPr>
-        <p:txBody>
-          <a:bodyPr wrap="square" lIns="0" rIns="0" tIns="0" bIns="0" anchor="t">
-            <a:noAutofit/>
-          </a:bodyPr>
-          <a:lstStyle/>
-          <a:p>
-            <a:pPr algn="r" rtl="1">
-              <a:lnSpc>
-                <a:spcPts val="1200"/>
-              </a:lnSpc>
-            </a:pPr>
-            <a:r>
-              <a:rPr sz="1000" b="1">
-                <a:solidFill>
-                  <a:srgbClr val="B44A22"/>
-                </a:solidFill>
-                <a:latin typeface="Arial"/>
-                <a:ea typeface="Arial"/>
-                <a:cs typeface="Arial"/>
-              </a:rPr>
-              <a:t>היום</a:t>
-            </a:r>
-          </a:p>
-        </p:txBody>
-      </p:sp>
-      <p:sp>
-        <p:nvSpPr>
           <p:cNvPr id="13" name="TextBox 12"/>
           <p:cNvSpPr txBox="1"/>
           <p:nvPr/>
         </p:nvSpPr>
         <p:spPr>
           <a:xfrm>
-            <a:off x="8111133" y="4845050"/>
+            <a:off x="8111133" y="4749800"/>
             <a:ext cx="3318867" cy="274241"/>
           </a:xfrm>
           <a:prstGeom prst="rect">
@@ -3549,7 +3549,7 @@
         </p:nvSpPr>
         <p:spPr>
           <a:xfrm>
-            <a:off x="8111133" y="5195491"/>
+            <a:off x="8111133" y="5100241"/>
             <a:ext cx="3318867" cy="213320"/>
           </a:xfrm>
           <a:prstGeom prst="rect">
@@ -3590,7 +3590,7 @@
         </p:nvSpPr>
         <p:spPr>
           <a:xfrm>
-            <a:off x="4436566" y="4445000"/>
+            <a:off x="4436566" y="4559300"/>
             <a:ext cx="3318966" cy="38100"/>
           </a:xfrm>
           <a:prstGeom prst="rect">
@@ -3622,35 +3622,35 @@
         </p:nvSpPr>
         <p:spPr>
           <a:xfrm>
-            <a:off x="4436566" y="4610100"/>
-            <a:ext cx="3318966" cy="184150"/>
-          </a:xfrm>
-          <a:prstGeom prst="rect">
-            <a:avLst/>
-          </a:prstGeom>
-          <a:noFill/>
-        </p:spPr>
-        <p:txBody>
-          <a:bodyPr wrap="square" lIns="0" rIns="0" tIns="0" bIns="0" anchor="t">
-            <a:noAutofit/>
-          </a:bodyPr>
-          <a:lstStyle/>
-          <a:p>
-            <a:pPr algn="r" rtl="1">
-              <a:lnSpc>
-                <a:spcPts val="1200"/>
-              </a:lnSpc>
-            </a:pPr>
-            <a:r>
-              <a:rPr sz="1000" b="1">
-                <a:solidFill>
-                  <a:srgbClr val="B44A22"/>
-                </a:solidFill>
-                <a:latin typeface="Arial"/>
-                <a:ea typeface="Arial"/>
-                <a:cs typeface="Arial"/>
-              </a:rPr>
-              <a:t>התהליך</a:t>
+            <a:off x="4436566" y="4749800"/>
+            <a:ext cx="3318966" cy="274241"/>
+          </a:xfrm>
+          <a:prstGeom prst="rect">
+            <a:avLst/>
+          </a:prstGeom>
+          <a:noFill/>
+        </p:spPr>
+        <p:txBody>
+          <a:bodyPr wrap="square" lIns="0" rIns="0" tIns="0" bIns="0" anchor="t">
+            <a:noAutofit/>
+          </a:bodyPr>
+          <a:lstStyle/>
+          <a:p>
+            <a:pPr algn="r" rtl="1">
+              <a:lnSpc>
+                <a:spcPts val="2160"/>
+              </a:lnSpc>
+            </a:pPr>
+            <a:r>
+              <a:rPr sz="1800" b="1">
+                <a:solidFill>
+                  <a:srgbClr val="12212F"/>
+                </a:solidFill>
+                <a:latin typeface="Arial"/>
+                <a:ea typeface="Arial"/>
+                <a:cs typeface="Arial"/>
+              </a:rPr>
+              <a:t>בחינה</a:t>
             </a:r>
           </a:p>
         </p:txBody>
@@ -3663,48 +3663,7 @@
         </p:nvSpPr>
         <p:spPr>
           <a:xfrm>
-            <a:off x="4436566" y="4845050"/>
-            <a:ext cx="3318966" cy="274241"/>
-          </a:xfrm>
-          <a:prstGeom prst="rect">
-            <a:avLst/>
-          </a:prstGeom>
-          <a:noFill/>
-        </p:spPr>
-        <p:txBody>
-          <a:bodyPr wrap="square" lIns="0" rIns="0" tIns="0" bIns="0" anchor="t">
-            <a:noAutofit/>
-          </a:bodyPr>
-          <a:lstStyle/>
-          <a:p>
-            <a:pPr algn="r" rtl="1">
-              <a:lnSpc>
-                <a:spcPts val="2160"/>
-              </a:lnSpc>
-            </a:pPr>
-            <a:r>
-              <a:rPr sz="1800" b="1">
-                <a:solidFill>
-                  <a:srgbClr val="12212F"/>
-                </a:solidFill>
-                <a:latin typeface="Arial"/>
-                <a:ea typeface="Arial"/>
-                <a:cs typeface="Arial"/>
-              </a:rPr>
-              <a:t>בחינה</a:t>
-            </a:r>
-          </a:p>
-        </p:txBody>
-      </p:sp>
-      <p:sp>
-        <p:nvSpPr>
-          <p:cNvPr id="18" name="TextBox 17"/>
-          <p:cNvSpPr txBox="1"/>
-          <p:nvPr/>
-        </p:nvSpPr>
-        <p:spPr>
-          <a:xfrm>
-            <a:off x="4436566" y="5195491"/>
+            <a:off x="4436566" y="5100241"/>
             <a:ext cx="3318966" cy="213320"/>
           </a:xfrm>
           <a:prstGeom prst="rect">
@@ -3739,13 +3698,13 @@
       </p:sp>
       <p:sp>
         <p:nvSpPr>
-          <p:cNvPr id="19" name="Rectangle 18"/>
+          <p:cNvPr id="18" name="Rectangle 17"/>
           <p:cNvSpPr/>
           <p:nvPr/>
         </p:nvSpPr>
         <p:spPr>
           <a:xfrm>
-            <a:off x="762000" y="4445000"/>
+            <a:off x="762000" y="4559300"/>
             <a:ext cx="3318966" cy="38100"/>
           </a:xfrm>
           <a:prstGeom prst="rect">
@@ -3771,95 +3730,54 @@
       </p:sp>
       <p:sp>
         <p:nvSpPr>
+          <p:cNvPr id="19" name="TextBox 18"/>
+          <p:cNvSpPr txBox="1"/>
+          <p:nvPr/>
+        </p:nvSpPr>
+        <p:spPr>
+          <a:xfrm>
+            <a:off x="762000" y="4749800"/>
+            <a:ext cx="3318966" cy="274241"/>
+          </a:xfrm>
+          <a:prstGeom prst="rect">
+            <a:avLst/>
+          </a:prstGeom>
+          <a:noFill/>
+        </p:spPr>
+        <p:txBody>
+          <a:bodyPr wrap="square" lIns="0" rIns="0" tIns="0" bIns="0" anchor="t">
+            <a:noAutofit/>
+          </a:bodyPr>
+          <a:lstStyle/>
+          <a:p>
+            <a:pPr algn="r" rtl="1">
+              <a:lnSpc>
+                <a:spcPts val="2160"/>
+              </a:lnSpc>
+            </a:pPr>
+            <a:r>
+              <a:rPr sz="1800" b="1">
+                <a:solidFill>
+                  <a:srgbClr val="12212F"/>
+                </a:solidFill>
+                <a:latin typeface="Arial"/>
+                <a:ea typeface="Arial"/>
+                <a:cs typeface="Arial"/>
+              </a:rPr>
+              <a:t>החלטה</a:t>
+            </a:r>
+          </a:p>
+        </p:txBody>
+      </p:sp>
+      <p:sp>
+        <p:nvSpPr>
           <p:cNvPr id="20" name="TextBox 19"/>
           <p:cNvSpPr txBox="1"/>
           <p:nvPr/>
         </p:nvSpPr>
         <p:spPr>
           <a:xfrm>
-            <a:off x="762000" y="4610100"/>
-            <a:ext cx="3318966" cy="184150"/>
-          </a:xfrm>
-          <a:prstGeom prst="rect">
-            <a:avLst/>
-          </a:prstGeom>
-          <a:noFill/>
-        </p:spPr>
-        <p:txBody>
-          <a:bodyPr wrap="square" lIns="0" rIns="0" tIns="0" bIns="0" anchor="t">
-            <a:noAutofit/>
-          </a:bodyPr>
-          <a:lstStyle/>
-          <a:p>
-            <a:pPr algn="r" rtl="1">
-              <a:lnSpc>
-                <a:spcPts val="1200"/>
-              </a:lnSpc>
-            </a:pPr>
-            <a:r>
-              <a:rPr sz="1000" b="1">
-                <a:solidFill>
-                  <a:srgbClr val="2E6A69"/>
-                </a:solidFill>
-                <a:latin typeface="Arial"/>
-                <a:ea typeface="Arial"/>
-                <a:cs typeface="Arial"/>
-              </a:rPr>
-              <a:t>התוצר</a:t>
-            </a:r>
-          </a:p>
-        </p:txBody>
-      </p:sp>
-      <p:sp>
-        <p:nvSpPr>
-          <p:cNvPr id="21" name="TextBox 20"/>
-          <p:cNvSpPr txBox="1"/>
-          <p:nvPr/>
-        </p:nvSpPr>
-        <p:spPr>
-          <a:xfrm>
-            <a:off x="762000" y="4845050"/>
-            <a:ext cx="3318966" cy="274241"/>
-          </a:xfrm>
-          <a:prstGeom prst="rect">
-            <a:avLst/>
-          </a:prstGeom>
-          <a:noFill/>
-        </p:spPr>
-        <p:txBody>
-          <a:bodyPr wrap="square" lIns="0" rIns="0" tIns="0" bIns="0" anchor="t">
-            <a:noAutofit/>
-          </a:bodyPr>
-          <a:lstStyle/>
-          <a:p>
-            <a:pPr algn="r" rtl="1">
-              <a:lnSpc>
-                <a:spcPts val="2160"/>
-              </a:lnSpc>
-            </a:pPr>
-            <a:r>
-              <a:rPr sz="1800" b="1">
-                <a:solidFill>
-                  <a:srgbClr val="12212F"/>
-                </a:solidFill>
-                <a:latin typeface="Arial"/>
-                <a:ea typeface="Arial"/>
-                <a:cs typeface="Arial"/>
-              </a:rPr>
-              <a:t>החלטה</a:t>
-            </a:r>
-          </a:p>
-        </p:txBody>
-      </p:sp>
-      <p:sp>
-        <p:nvSpPr>
-          <p:cNvPr id="22" name="TextBox 21"/>
-          <p:cNvSpPr txBox="1"/>
-          <p:nvPr/>
-        </p:nvSpPr>
-        <p:spPr>
-          <a:xfrm>
-            <a:off x="762000" y="5195491"/>
+            <a:off x="762000" y="5100241"/>
             <a:ext cx="3318966" cy="213320"/>
           </a:xfrm>
           <a:prstGeom prst="rect">
@@ -3894,7 +3812,7 @@
       </p:sp>
       <p:sp>
         <p:nvSpPr>
-          <p:cNvPr id="23" name="Rectangle 22"/>
+          <p:cNvPr id="21" name="Rectangle 20"/>
           <p:cNvSpPr/>
           <p:nvPr/>
         </p:nvSpPr>
@@ -3926,7 +3844,7 @@
       </p:sp>
       <p:sp>
         <p:nvSpPr>
-          <p:cNvPr id="24" name="TextBox 23"/>
+          <p:cNvPr id="22" name="TextBox 21"/>
           <p:cNvSpPr txBox="1"/>
           <p:nvPr/>
         </p:nvSpPr>
@@ -3967,7 +3885,7 @@
       </p:sp>
       <p:sp>
         <p:nvSpPr>
-          <p:cNvPr id="25" name="TextBox 24"/>
+          <p:cNvPr id="23" name="TextBox 22"/>
           <p:cNvSpPr txBox="1"/>
           <p:nvPr/>
         </p:nvSpPr>
